--- a/content/patellar-tendinopathy-loading/delivery/patellar-tendinopathy-loading.pptx
+++ b/content/patellar-tendinopathy-loading/delivery/patellar-tendinopathy-loading.pptx
@@ -413,7 +413,38 @@
       </p:pic>
       <p:sp>
         <p:nvSpPr>
-          <p:cNvPr id="3" name="B01 프레임"/>
+          <p:cNvPr id="3" name="연한 박스"/>
+          <p:cNvSpPr/>
+          <p:nvPr/>
+        </p:nvSpPr>
+        <p:spPr>
+          <a:xfrm>
+            <a:off x="4457700" y="4328071"/>
+            <a:ext cx="2067818" cy="647700"/>
+          </a:xfrm>
+          <a:prstGeom prst="roundRect">
+            <a:avLst>
+              <a:gd name="adj" fmla="val 58824"/>
+            </a:avLst>
+          </a:prstGeom>
+          <a:solidFill>
+            <a:srgbClr val="CC414A"/>
+          </a:solidFill>
+          <a:ln>
+            <a:noFill/>
+          </a:ln>
+        </p:spPr>
+        <p:txBody>
+          <a:bodyPr rtlCol="0" anchor="ctr"/>
+          <a:lstStyle/>
+          <a:p>
+            <a:endParaRPr lang="ko-KR"/>
+          </a:p>
+        </p:txBody>
+      </p:sp>
+      <p:sp>
+        <p:nvSpPr>
+          <p:cNvPr id="4" name="B01 프레임"/>
           <p:cNvSpPr/>
           <p:nvPr/>
         </p:nvSpPr>
@@ -444,7 +475,7 @@
       </p:sp>
       <p:sp>
         <p:nvSpPr>
-          <p:cNvPr id="4" name="텍스트: 힘줄에도"/>
+          <p:cNvPr id="5" name="텍스트: 힘줄에도"/>
           <p:cNvSpPr txBox="1"/>
           <p:nvPr/>
         </p:nvSpPr>
@@ -503,7 +534,7 @@
       </p:sp>
       <p:sp>
         <p:nvSpPr>
-          <p:cNvPr id="5" name="텍스트: 감당할 수 있는"/>
+          <p:cNvPr id="6" name="텍스트: 감당할 수 있는"/>
           <p:cNvSpPr txBox="1"/>
           <p:nvPr/>
         </p:nvSpPr>
@@ -562,7 +593,7 @@
       </p:sp>
       <p:sp>
         <p:nvSpPr>
-          <p:cNvPr id="6" name="텍스트: 부하가 있습니다"/>
+          <p:cNvPr id="7" name="텍스트: 부하가 있습니다"/>
           <p:cNvSpPr txBox="1"/>
           <p:nvPr/>
         </p:nvSpPr>
@@ -632,7 +663,66 @@
       </p:sp>
       <p:sp>
         <p:nvSpPr>
-          <p:cNvPr id="7" name="텍스트: 컵 = 감당할 수 있는 능력"/>
+          <p:cNvPr id="8" name="텍스트: 앗! 통증?!"/>
+          <p:cNvSpPr txBox="1"/>
+          <p:nvPr/>
+        </p:nvSpPr>
+        <p:spPr>
+          <a:xfrm>
+            <a:off x="4133850" y="4446181"/>
+            <a:ext cx="2715518" cy="457200"/>
+          </a:xfrm>
+          <a:prstGeom prst="rect">
+            <a:avLst/>
+          </a:prstGeom>
+          <a:noFill/>
+          <a:ln>
+            <a:noFill/>
+          </a:ln>
+        </p:spPr>
+        <p:txBody>
+          <a:bodyPr vert="horz" wrap="none" lIns="0" tIns="0" rIns="0" bIns="0" rtlCol="0" anchor="ctr" anchorCtr="0">
+            <a:noAutofit/>
+          </a:bodyPr>
+          <a:lstStyle/>
+          <a:p>
+            <a:pPr algn="ctr">
+              <a:lnSpc>
+                <a:spcPct val="100000"/>
+              </a:lnSpc>
+              <a:spcBef>
+                <a:spcPts val="0"/>
+              </a:spcBef>
+              <a:spcAft>
+                <a:spcPts val="0"/>
+              </a:spcAft>
+              <a:buNone/>
+            </a:pPr>
+            <a:r>
+              <a:rPr lang="ko-KR" altLang="en-US" sz="3000" b="0" i="0" spc="-90" kern="0" dirty="0">
+                <a:solidFill>
+                  <a:srgbClr val="FFFFFF"/>
+                </a:solidFill>
+                <a:latin typeface="RCardnews W800" pitchFamily="34" charset="-127"/>
+                <a:ea typeface="RCardnews W800" pitchFamily="34" charset="-127"/>
+                <a:cs typeface="RCardnews W800" pitchFamily="34" charset="-127"/>
+              </a:rPr>
+              <a:t xml:space="preserve">앗! 통증?!</a:t>
+            </a:r>
+            <a:endParaRPr lang="ko-KR" altLang="en-US" sz="3000" b="0" i="0" spc="-90" kern="0" dirty="0">
+              <a:solidFill>
+                <a:srgbClr val="FFFFFF"/>
+              </a:solidFill>
+              <a:latin typeface="RCardnews W800" pitchFamily="34" charset="-127"/>
+              <a:ea typeface="RCardnews W800" pitchFamily="34" charset="-127"/>
+              <a:cs typeface="RCardnews W800" pitchFamily="34" charset="-127"/>
+            </a:endParaRPr>
+          </a:p>
+        </p:txBody>
+      </p:sp>
+      <p:sp>
+        <p:nvSpPr>
+          <p:cNvPr id="9" name="텍스트: 컵 = 감당할 수 있는 능력"/>
           <p:cNvSpPr txBox="1"/>
           <p:nvPr/>
         </p:nvSpPr>
@@ -691,7 +781,7 @@
       </p:sp>
       <p:sp>
         <p:nvSpPr>
-          <p:cNvPr id="8" name="텍스트: 물 = 운동 부하"/>
+          <p:cNvPr id="10" name="텍스트: 물 = 운동 부하"/>
           <p:cNvSpPr txBox="1"/>
           <p:nvPr/>
         </p:nvSpPr>
@@ -750,7 +840,7 @@
       </p:sp>
       <p:sp>
         <p:nvSpPr>
-          <p:cNvPr id="9" name="텍스트: 점프·강도·빈도가"/>
+          <p:cNvPr id="11" name="텍스트: 점프·강도·빈도가"/>
           <p:cNvSpPr txBox="1"/>
           <p:nvPr/>
         </p:nvSpPr>
@@ -809,7 +899,7 @@
       </p:sp>
       <p:sp>
         <p:nvSpPr>
-          <p:cNvPr id="10" name="텍스트: 갑자기 늘면"/>
+          <p:cNvPr id="12" name="텍스트: 갑자기 늘면"/>
           <p:cNvSpPr txBox="1"/>
           <p:nvPr/>
         </p:nvSpPr>
@@ -879,7 +969,7 @@
       </p:sp>
       <p:sp>
         <p:nvSpPr>
-          <p:cNvPr id="11" name="텍스트: 운동량이나 강도가 갑자기 늘면"/>
+          <p:cNvPr id="13" name="텍스트: 운동량이나 강도가 갑자기 늘면"/>
           <p:cNvSpPr txBox="1"/>
           <p:nvPr/>
         </p:nvSpPr>
@@ -938,7 +1028,7 @@
       </p:sp>
       <p:sp>
         <p:nvSpPr>
-          <p:cNvPr id="12" name="텍스트: 감당 능력을 넘어설 수 있습니다."/>
+          <p:cNvPr id="14" name="텍스트: 감당 능력을 넘어설 수 있습니다."/>
           <p:cNvSpPr txBox="1"/>
           <p:nvPr/>
         </p:nvSpPr>
@@ -997,7 +1087,7 @@
       </p:sp>
       <p:sp>
         <p:nvSpPr>
-          <p:cNvPr id="13" name="텍스트: 문제는 운동 자체보다"/>
+          <p:cNvPr id="15" name="텍스트: 문제는 운동 자체보다"/>
           <p:cNvSpPr txBox="1"/>
           <p:nvPr/>
         </p:nvSpPr>
@@ -1056,7 +1146,7 @@
       </p:sp>
       <p:sp>
         <p:nvSpPr>
-          <p:cNvPr id="14" name="텍스트: 갑작스러운 증가일 수 있습니다"/>
+          <p:cNvPr id="16" name="텍스트: 갑작스러운 증가일 수 있습니다"/>
           <p:cNvSpPr txBox="1"/>
           <p:nvPr/>
         </p:nvSpPr>
@@ -1126,7 +1216,7 @@
       </p:sp>
       <p:sp>
         <p:nvSpPr>
-          <p:cNvPr id="15" name="텍스트: 참고: Cook et al., Br J Sp"/>
+          <p:cNvPr id="17" name="텍스트: 참고: Cook et al., Br J Sp"/>
           <p:cNvSpPr txBox="1"/>
           <p:nvPr/>
         </p:nvSpPr>
@@ -1233,7 +1323,7 @@
         <p:spPr>
           <a:xfrm>
             <a:off x="914400" y="3291780"/>
-            <a:ext cx="8458200" cy="3429000"/>
+            <a:ext cx="8458200" cy="4000500"/>
           </a:xfrm>
           <a:prstGeom prst="rect">
             <a:avLst/>
@@ -1408,7 +1498,7 @@
         </p:nvSpPr>
         <p:spPr>
           <a:xfrm>
-            <a:off x="1696641" y="6884229"/>
+            <a:off x="1696641" y="7455729"/>
             <a:ext cx="6893570" cy="409575"/>
           </a:xfrm>
           <a:prstGeom prst="rect">
@@ -1467,7 +1557,7 @@
         </p:nvSpPr>
         <p:spPr>
           <a:xfrm>
-            <a:off x="1521023" y="7797397"/>
+            <a:off x="1521023" y="8330797"/>
             <a:ext cx="7244804" cy="504825"/>
           </a:xfrm>
           <a:prstGeom prst="rect">
@@ -1520,14 +1610,14 @@
       </p:sp>
       <p:sp>
         <p:nvSpPr>
-          <p:cNvPr id="8" name="텍스트: 감당 가능한 운동부터 시작해"/>
-          <p:cNvSpPr txBox="1"/>
-          <p:nvPr/>
-        </p:nvSpPr>
-        <p:spPr>
-          <a:xfrm>
-            <a:off x="2145209" y="8392412"/>
-            <a:ext cx="5996285" cy="504825"/>
+          <p:cNvPr id="8" name="텍스트: 감당 가능한 운동부터 단계적으로!"/>
+          <p:cNvSpPr txBox="1"/>
+          <p:nvPr/>
+        </p:nvSpPr>
+        <p:spPr>
+          <a:xfrm>
+            <a:off x="1700212" y="8925812"/>
+            <a:ext cx="6886426" cy="504825"/>
           </a:xfrm>
           <a:prstGeom prst="rect">
             <a:avLst/>
@@ -1564,7 +1654,7 @@
                 <a:ea typeface="RCardnews W500" pitchFamily="34" charset="-127"/>
                 <a:cs typeface="RCardnews W500" pitchFamily="34" charset="-127"/>
               </a:rPr>
-              <a:t xml:space="preserve">감당 가능한 운동부터 시작해</a:t>
+              <a:t xml:space="preserve">감당 가능한 운동부터 단계적으로!</a:t>
             </a:r>
             <a:endParaRPr lang="ko-KR" altLang="en-US" sz="3300" b="0" i="0" spc="-66" kern="0" dirty="0">
               <a:solidFill>
@@ -1579,72 +1669,13 @@
       </p:sp>
       <p:sp>
         <p:nvSpPr>
-          <p:cNvPr id="9" name="텍스트: 능력을 단계적으로 키웁니다."/>
-          <p:cNvSpPr txBox="1"/>
-          <p:nvPr/>
-        </p:nvSpPr>
-        <p:spPr>
-          <a:xfrm>
-            <a:off x="2141339" y="8987427"/>
-            <a:ext cx="6004173" cy="504825"/>
-          </a:xfrm>
-          <a:prstGeom prst="rect">
-            <a:avLst/>
-          </a:prstGeom>
-          <a:noFill/>
-          <a:ln>
-            <a:noFill/>
-          </a:ln>
-        </p:spPr>
-        <p:txBody>
-          <a:bodyPr vert="horz" wrap="none" lIns="0" tIns="0" rIns="0" bIns="0" rtlCol="0" anchor="ctr" anchorCtr="0">
-            <a:noAutofit/>
-          </a:bodyPr>
-          <a:lstStyle/>
-          <a:p>
-            <a:pPr algn="ctr">
-              <a:lnSpc>
-                <a:spcPct val="100000"/>
-              </a:lnSpc>
-              <a:spcBef>
-                <a:spcPts val="0"/>
-              </a:spcBef>
-              <a:spcAft>
-                <a:spcPts val="0"/>
-              </a:spcAft>
-              <a:buNone/>
-            </a:pPr>
-            <a:r>
-              <a:rPr lang="ko-KR" altLang="en-US" sz="3300" b="0" i="0" spc="-66" kern="0" dirty="0">
-                <a:solidFill>
-                  <a:srgbClr val="121416"/>
-                </a:solidFill>
-                <a:latin typeface="RCardnews W500" pitchFamily="34" charset="-127"/>
-                <a:ea typeface="RCardnews W500" pitchFamily="34" charset="-127"/>
-                <a:cs typeface="RCardnews W500" pitchFamily="34" charset="-127"/>
-              </a:rPr>
-              <a:t xml:space="preserve">능력을 단계적으로 키웁니다.</a:t>
-            </a:r>
-            <a:endParaRPr lang="ko-KR" altLang="en-US" sz="3300" b="0" i="0" spc="-66" kern="0" dirty="0">
-              <a:solidFill>
-                <a:srgbClr val="121416"/>
-              </a:solidFill>
-              <a:latin typeface="RCardnews W500" pitchFamily="34" charset="-127"/>
-              <a:ea typeface="RCardnews W500" pitchFamily="34" charset="-127"/>
-              <a:cs typeface="RCardnews W500" pitchFamily="34" charset="-127"/>
-            </a:endParaRPr>
-          </a:p>
-        </p:txBody>
-      </p:sp>
-      <p:sp>
-        <p:nvSpPr>
-          <p:cNvPr id="10" name="텍스트: 무조건 쉬기보다,"/>
-          <p:cNvSpPr txBox="1"/>
-          <p:nvPr/>
-        </p:nvSpPr>
-        <p:spPr>
-          <a:xfrm>
-            <a:off x="3149054" y="9944392"/>
+          <p:cNvPr id="9" name="텍스트: 무조건 쉬기보다,"/>
+          <p:cNvSpPr txBox="1"/>
+          <p:nvPr/>
+        </p:nvSpPr>
+        <p:spPr>
+          <a:xfrm>
+            <a:off x="3149054" y="9844677"/>
             <a:ext cx="3988743" cy="504825"/>
           </a:xfrm>
           <a:prstGeom prst="rect">
@@ -1697,13 +1728,13 @@
       </p:sp>
       <p:sp>
         <p:nvSpPr>
-          <p:cNvPr id="11" name="텍스트: 감당 가능한 부하부터"/>
-          <p:cNvSpPr txBox="1"/>
-          <p:nvPr/>
-        </p:nvSpPr>
-        <p:spPr>
-          <a:xfrm>
-            <a:off x="2788593" y="10489103"/>
+          <p:cNvPr id="10" name="텍스트: 감당 가능한 부하부터"/>
+          <p:cNvSpPr txBox="1"/>
+          <p:nvPr/>
+        </p:nvSpPr>
+        <p:spPr>
+          <a:xfrm>
+            <a:off x="2788593" y="10389388"/>
             <a:ext cx="4709666" cy="504825"/>
           </a:xfrm>
           <a:prstGeom prst="rect">
@@ -1767,13 +1798,13 @@
       </p:sp>
       <p:sp>
         <p:nvSpPr>
-          <p:cNvPr id="12" name="텍스트: 참고: Cook 2016 · Kongsgaa"/>
-          <p:cNvSpPr txBox="1"/>
-          <p:nvPr/>
-        </p:nvSpPr>
-        <p:spPr>
-          <a:xfrm>
-            <a:off x="1380976" y="11254413"/>
+          <p:cNvPr id="11" name="텍스트: 참고: Cook 2016 · Kongsgaa"/>
+          <p:cNvSpPr txBox="1"/>
+          <p:nvPr/>
+        </p:nvSpPr>
+        <p:spPr>
+          <a:xfrm>
+            <a:off x="1380976" y="11154698"/>
             <a:ext cx="7525048" cy="342900"/>
           </a:xfrm>
           <a:prstGeom prst="rect">

--- a/content/patellar-tendinopathy-loading/delivery/patellar-tendinopathy-loading.pptx
+++ b/content/patellar-tendinopathy-loading/delivery/patellar-tendinopathy-loading.pptx
@@ -389,7 +389,7 @@
       </p:grpSpPr>
       <p:pic>
         <p:nvPicPr>
-          <p:cNvPr id="2" name="사진" descr="적당히 찬 물컵과 물이 갑자기 쏟아져 넘치는 물컵"/>
+          <p:cNvPr id="2" name="사진" descr="적당히 찬 물컵과 훈련이 몰려 넘치는 물컵"/>
           <p:cNvPicPr>
             <a:picLocks noChangeAspect="1"/>
           </p:cNvPicPr>
@@ -419,7 +419,131 @@
         </p:nvSpPr>
         <p:spPr>
           <a:xfrm>
-            <a:off x="4457700" y="4328071"/>
+            <a:off x="6162675" y="4423321"/>
+            <a:ext cx="1954560" cy="560040"/>
+          </a:xfrm>
+          <a:prstGeom prst="roundRect">
+            <a:avLst>
+              <a:gd name="adj" fmla="val 20409"/>
+            </a:avLst>
+          </a:prstGeom>
+          <a:solidFill>
+            <a:srgbClr val="0879D8"/>
+          </a:solidFill>
+          <a:ln>
+            <a:noFill/>
+          </a:ln>
+        </p:spPr>
+        <p:txBody>
+          <a:bodyPr rtlCol="0" anchor="ctr"/>
+          <a:lstStyle/>
+          <a:p>
+            <a:endParaRPr lang="ko-KR"/>
+          </a:p>
+        </p:txBody>
+      </p:sp>
+      <p:sp>
+        <p:nvSpPr>
+          <p:cNvPr id="4" name="연한 박스"/>
+          <p:cNvSpPr/>
+          <p:nvPr/>
+        </p:nvSpPr>
+        <p:spPr>
+          <a:xfrm>
+            <a:off x="6743700" y="3947071"/>
+            <a:ext cx="953393" cy="560040"/>
+          </a:xfrm>
+          <a:prstGeom prst="roundRect">
+            <a:avLst>
+              <a:gd name="adj" fmla="val 20409"/>
+            </a:avLst>
+          </a:prstGeom>
+          <a:solidFill>
+            <a:srgbClr val="0879D8"/>
+          </a:solidFill>
+          <a:ln>
+            <a:noFill/>
+          </a:ln>
+        </p:spPr>
+        <p:txBody>
+          <a:bodyPr rtlCol="0" anchor="ctr"/>
+          <a:lstStyle/>
+          <a:p>
+            <a:endParaRPr lang="ko-KR"/>
+          </a:p>
+        </p:txBody>
+      </p:sp>
+      <p:sp>
+        <p:nvSpPr>
+          <p:cNvPr id="5" name="연한 박스"/>
+          <p:cNvSpPr/>
+          <p:nvPr/>
+        </p:nvSpPr>
+        <p:spPr>
+          <a:xfrm>
+            <a:off x="5162550" y="5204371"/>
+            <a:ext cx="1258491" cy="560040"/>
+          </a:xfrm>
+          <a:prstGeom prst="roundRect">
+            <a:avLst>
+              <a:gd name="adj" fmla="val 20409"/>
+            </a:avLst>
+          </a:prstGeom>
+          <a:solidFill>
+            <a:srgbClr val="0879D8"/>
+          </a:solidFill>
+          <a:ln>
+            <a:noFill/>
+          </a:ln>
+        </p:spPr>
+        <p:txBody>
+          <a:bodyPr rtlCol="0" anchor="ctr"/>
+          <a:lstStyle/>
+          <a:p>
+            <a:endParaRPr lang="ko-KR"/>
+          </a:p>
+        </p:txBody>
+      </p:sp>
+      <p:sp>
+        <p:nvSpPr>
+          <p:cNvPr id="6" name="연한 박스"/>
+          <p:cNvSpPr/>
+          <p:nvPr/>
+        </p:nvSpPr>
+        <p:spPr>
+          <a:xfrm>
+            <a:off x="8020050" y="5623471"/>
+            <a:ext cx="1258491" cy="560040"/>
+          </a:xfrm>
+          <a:prstGeom prst="roundRect">
+            <a:avLst>
+              <a:gd name="adj" fmla="val 20409"/>
+            </a:avLst>
+          </a:prstGeom>
+          <a:solidFill>
+            <a:srgbClr val="0879D8"/>
+          </a:solidFill>
+          <a:ln>
+            <a:noFill/>
+          </a:ln>
+        </p:spPr>
+        <p:txBody>
+          <a:bodyPr rtlCol="0" anchor="ctr"/>
+          <a:lstStyle/>
+          <a:p>
+            <a:endParaRPr lang="ko-KR"/>
+          </a:p>
+        </p:txBody>
+      </p:sp>
+      <p:sp>
+        <p:nvSpPr>
+          <p:cNvPr id="7" name="연한 박스"/>
+          <p:cNvSpPr/>
+          <p:nvPr/>
+        </p:nvSpPr>
+        <p:spPr>
+          <a:xfrm>
+            <a:off x="4038600" y="3985171"/>
             <a:ext cx="2067818" cy="647700"/>
           </a:xfrm>
           <a:prstGeom prst="roundRect">
@@ -444,7 +568,7 @@
       </p:sp>
       <p:sp>
         <p:nvSpPr>
-          <p:cNvPr id="4" name="B01 프레임"/>
+          <p:cNvPr id="8" name="B01 프레임"/>
           <p:cNvSpPr/>
           <p:nvPr/>
         </p:nvSpPr>
@@ -475,7 +599,7 @@
       </p:sp>
       <p:sp>
         <p:nvSpPr>
-          <p:cNvPr id="5" name="텍스트: 힘줄에도"/>
+          <p:cNvPr id="9" name="텍스트: 힘줄에도"/>
           <p:cNvSpPr txBox="1"/>
           <p:nvPr/>
         </p:nvSpPr>
@@ -534,7 +658,7 @@
       </p:sp>
       <p:sp>
         <p:nvSpPr>
-          <p:cNvPr id="6" name="텍스트: 감당할 수 있는"/>
+          <p:cNvPr id="10" name="텍스트: 감당할 수 있는"/>
           <p:cNvSpPr txBox="1"/>
           <p:nvPr/>
         </p:nvSpPr>
@@ -593,7 +717,7 @@
       </p:sp>
       <p:sp>
         <p:nvSpPr>
-          <p:cNvPr id="7" name="텍스트: 부하가 있습니다"/>
+          <p:cNvPr id="11" name="텍스트: 부하가 있습니다"/>
           <p:cNvSpPr txBox="1"/>
           <p:nvPr/>
         </p:nvSpPr>
@@ -663,13 +787,249 @@
       </p:sp>
       <p:sp>
         <p:nvSpPr>
-          <p:cNvPr id="8" name="텍스트: 앗! 통증?!"/>
-          <p:cNvSpPr txBox="1"/>
-          <p:nvPr/>
-        </p:nvSpPr>
-        <p:spPr>
-          <a:xfrm>
-            <a:off x="4133850" y="4446181"/>
+          <p:cNvPr id="12" name="텍스트: 무리한 대회"/>
+          <p:cNvSpPr txBox="1"/>
+          <p:nvPr/>
+        </p:nvSpPr>
+        <p:spPr>
+          <a:xfrm>
+            <a:off x="5762625" y="4510570"/>
+            <a:ext cx="2754660" cy="409575"/>
+          </a:xfrm>
+          <a:prstGeom prst="rect">
+            <a:avLst/>
+          </a:prstGeom>
+          <a:noFill/>
+          <a:ln>
+            <a:noFill/>
+          </a:ln>
+        </p:spPr>
+        <p:txBody>
+          <a:bodyPr vert="horz" wrap="none" lIns="0" tIns="0" rIns="0" bIns="0" rtlCol="0" anchor="ctr" anchorCtr="0">
+            <a:noAutofit/>
+          </a:bodyPr>
+          <a:lstStyle/>
+          <a:p>
+            <a:pPr algn="ctr">
+              <a:lnSpc>
+                <a:spcPct val="100000"/>
+              </a:lnSpc>
+              <a:spcBef>
+                <a:spcPts val="0"/>
+              </a:spcBef>
+              <a:spcAft>
+                <a:spcPts val="0"/>
+              </a:spcAft>
+              <a:buNone/>
+            </a:pPr>
+            <a:r>
+              <a:rPr lang="ko-KR" altLang="en-US" sz="2700" b="0" i="0" spc="-81" kern="0" dirty="0">
+                <a:solidFill>
+                  <a:srgbClr val="FFFFFF"/>
+                </a:solidFill>
+                <a:latin typeface="RCardnews W750" pitchFamily="34" charset="-127"/>
+                <a:ea typeface="RCardnews W750" pitchFamily="34" charset="-127"/>
+                <a:cs typeface="RCardnews W750" pitchFamily="34" charset="-127"/>
+              </a:rPr>
+              <a:t xml:space="preserve">무리한 대회</a:t>
+            </a:r>
+            <a:endParaRPr lang="ko-KR" altLang="en-US" sz="2700" b="0" i="0" spc="-81" kern="0" dirty="0">
+              <a:solidFill>
+                <a:srgbClr val="FFFFFF"/>
+              </a:solidFill>
+              <a:latin typeface="RCardnews W750" pitchFamily="34" charset="-127"/>
+              <a:ea typeface="RCardnews W750" pitchFamily="34" charset="-127"/>
+              <a:cs typeface="RCardnews W750" pitchFamily="34" charset="-127"/>
+            </a:endParaRPr>
+          </a:p>
+        </p:txBody>
+      </p:sp>
+      <p:sp>
+        <p:nvSpPr>
+          <p:cNvPr id="13" name="텍스트: 템포"/>
+          <p:cNvSpPr txBox="1"/>
+          <p:nvPr/>
+        </p:nvSpPr>
+        <p:spPr>
+          <a:xfrm>
+            <a:off x="6343650" y="4034320"/>
+            <a:ext cx="1753493" cy="409575"/>
+          </a:xfrm>
+          <a:prstGeom prst="rect">
+            <a:avLst/>
+          </a:prstGeom>
+          <a:noFill/>
+          <a:ln>
+            <a:noFill/>
+          </a:ln>
+        </p:spPr>
+        <p:txBody>
+          <a:bodyPr vert="horz" wrap="none" lIns="0" tIns="0" rIns="0" bIns="0" rtlCol="0" anchor="ctr" anchorCtr="0">
+            <a:noAutofit/>
+          </a:bodyPr>
+          <a:lstStyle/>
+          <a:p>
+            <a:pPr algn="ctr">
+              <a:lnSpc>
+                <a:spcPct val="100000"/>
+              </a:lnSpc>
+              <a:spcBef>
+                <a:spcPts val="0"/>
+              </a:spcBef>
+              <a:spcAft>
+                <a:spcPts val="0"/>
+              </a:spcAft>
+              <a:buNone/>
+            </a:pPr>
+            <a:r>
+              <a:rPr lang="ko-KR" altLang="en-US" sz="2700" b="0" i="0" spc="-81" kern="0" dirty="0">
+                <a:solidFill>
+                  <a:srgbClr val="FFFFFF"/>
+                </a:solidFill>
+                <a:latin typeface="RCardnews W750" pitchFamily="34" charset="-127"/>
+                <a:ea typeface="RCardnews W750" pitchFamily="34" charset="-127"/>
+                <a:cs typeface="RCardnews W750" pitchFamily="34" charset="-127"/>
+              </a:rPr>
+              <a:t xml:space="preserve">템포</a:t>
+            </a:r>
+            <a:endParaRPr lang="ko-KR" altLang="en-US" sz="2700" b="0" i="0" spc="-81" kern="0" dirty="0">
+              <a:solidFill>
+                <a:srgbClr val="FFFFFF"/>
+              </a:solidFill>
+              <a:latin typeface="RCardnews W750" pitchFamily="34" charset="-127"/>
+              <a:ea typeface="RCardnews W750" pitchFamily="34" charset="-127"/>
+              <a:cs typeface="RCardnews W750" pitchFamily="34" charset="-127"/>
+            </a:endParaRPr>
+          </a:p>
+        </p:txBody>
+      </p:sp>
+      <p:sp>
+        <p:nvSpPr>
+          <p:cNvPr id="14" name="텍스트: 인터벌"/>
+          <p:cNvSpPr txBox="1"/>
+          <p:nvPr/>
+        </p:nvSpPr>
+        <p:spPr>
+          <a:xfrm>
+            <a:off x="4762500" y="5291620"/>
+            <a:ext cx="2058591" cy="409575"/>
+          </a:xfrm>
+          <a:prstGeom prst="rect">
+            <a:avLst/>
+          </a:prstGeom>
+          <a:noFill/>
+          <a:ln>
+            <a:noFill/>
+          </a:ln>
+        </p:spPr>
+        <p:txBody>
+          <a:bodyPr vert="horz" wrap="none" lIns="0" tIns="0" rIns="0" bIns="0" rtlCol="0" anchor="ctr" anchorCtr="0">
+            <a:noAutofit/>
+          </a:bodyPr>
+          <a:lstStyle/>
+          <a:p>
+            <a:pPr algn="ctr">
+              <a:lnSpc>
+                <a:spcPct val="100000"/>
+              </a:lnSpc>
+              <a:spcBef>
+                <a:spcPts val="0"/>
+              </a:spcBef>
+              <a:spcAft>
+                <a:spcPts val="0"/>
+              </a:spcAft>
+              <a:buNone/>
+            </a:pPr>
+            <a:r>
+              <a:rPr lang="ko-KR" altLang="en-US" sz="2700" b="0" i="0" spc="-81" kern="0" dirty="0">
+                <a:solidFill>
+                  <a:srgbClr val="FFFFFF"/>
+                </a:solidFill>
+                <a:latin typeface="RCardnews W750" pitchFamily="34" charset="-127"/>
+                <a:ea typeface="RCardnews W750" pitchFamily="34" charset="-127"/>
+                <a:cs typeface="RCardnews W750" pitchFamily="34" charset="-127"/>
+              </a:rPr>
+              <a:t xml:space="preserve">인터벌</a:t>
+            </a:r>
+            <a:endParaRPr lang="ko-KR" altLang="en-US" sz="2700" b="0" i="0" spc="-81" kern="0" dirty="0">
+              <a:solidFill>
+                <a:srgbClr val="FFFFFF"/>
+              </a:solidFill>
+              <a:latin typeface="RCardnews W750" pitchFamily="34" charset="-127"/>
+              <a:ea typeface="RCardnews W750" pitchFamily="34" charset="-127"/>
+              <a:cs typeface="RCardnews W750" pitchFamily="34" charset="-127"/>
+            </a:endParaRPr>
+          </a:p>
+        </p:txBody>
+      </p:sp>
+      <p:sp>
+        <p:nvSpPr>
+          <p:cNvPr id="15" name="텍스트: 장거리"/>
+          <p:cNvSpPr txBox="1"/>
+          <p:nvPr/>
+        </p:nvSpPr>
+        <p:spPr>
+          <a:xfrm>
+            <a:off x="7620000" y="5710720"/>
+            <a:ext cx="2058591" cy="409575"/>
+          </a:xfrm>
+          <a:prstGeom prst="rect">
+            <a:avLst/>
+          </a:prstGeom>
+          <a:noFill/>
+          <a:ln>
+            <a:noFill/>
+          </a:ln>
+        </p:spPr>
+        <p:txBody>
+          <a:bodyPr vert="horz" wrap="none" lIns="0" tIns="0" rIns="0" bIns="0" rtlCol="0" anchor="ctr" anchorCtr="0">
+            <a:noAutofit/>
+          </a:bodyPr>
+          <a:lstStyle/>
+          <a:p>
+            <a:pPr algn="ctr">
+              <a:lnSpc>
+                <a:spcPct val="100000"/>
+              </a:lnSpc>
+              <a:spcBef>
+                <a:spcPts val="0"/>
+              </a:spcBef>
+              <a:spcAft>
+                <a:spcPts val="0"/>
+              </a:spcAft>
+              <a:buNone/>
+            </a:pPr>
+            <a:r>
+              <a:rPr lang="ko-KR" altLang="en-US" sz="2700" b="0" i="0" spc="-81" kern="0" dirty="0">
+                <a:solidFill>
+                  <a:srgbClr val="FFFFFF"/>
+                </a:solidFill>
+                <a:latin typeface="RCardnews W750" pitchFamily="34" charset="-127"/>
+                <a:ea typeface="RCardnews W750" pitchFamily="34" charset="-127"/>
+                <a:cs typeface="RCardnews W750" pitchFamily="34" charset="-127"/>
+              </a:rPr>
+              <a:t xml:space="preserve">장거리</a:t>
+            </a:r>
+            <a:endParaRPr lang="ko-KR" altLang="en-US" sz="2700" b="0" i="0" spc="-81" kern="0" dirty="0">
+              <a:solidFill>
+                <a:srgbClr val="FFFFFF"/>
+              </a:solidFill>
+              <a:latin typeface="RCardnews W750" pitchFamily="34" charset="-127"/>
+              <a:ea typeface="RCardnews W750" pitchFamily="34" charset="-127"/>
+              <a:cs typeface="RCardnews W750" pitchFamily="34" charset="-127"/>
+            </a:endParaRPr>
+          </a:p>
+        </p:txBody>
+      </p:sp>
+      <p:sp>
+        <p:nvSpPr>
+          <p:cNvPr id="16" name="텍스트: 앗! 통증?!"/>
+          <p:cNvSpPr txBox="1"/>
+          <p:nvPr/>
+        </p:nvSpPr>
+        <p:spPr>
+          <a:xfrm>
+            <a:off x="3714750" y="4103281"/>
             <a:ext cx="2715518" cy="457200"/>
           </a:xfrm>
           <a:prstGeom prst="rect">
@@ -722,7 +1082,7 @@
       </p:sp>
       <p:sp>
         <p:nvSpPr>
-          <p:cNvPr id="9" name="텍스트: 컵 = 감당할 수 있는 능력"/>
+          <p:cNvPr id="17" name="텍스트: 컵 = 감당할 수 있는 능력"/>
           <p:cNvSpPr txBox="1"/>
           <p:nvPr/>
         </p:nvSpPr>
@@ -781,7 +1141,7 @@
       </p:sp>
       <p:sp>
         <p:nvSpPr>
-          <p:cNvPr id="10" name="텍스트: 물 = 운동 부하"/>
+          <p:cNvPr id="18" name="텍스트: 물 = 운동 부하"/>
           <p:cNvSpPr txBox="1"/>
           <p:nvPr/>
         </p:nvSpPr>
@@ -840,14 +1200,14 @@
       </p:sp>
       <p:sp>
         <p:nvSpPr>
-          <p:cNvPr id="11" name="텍스트: 점프·강도·빈도가"/>
-          <p:cNvSpPr txBox="1"/>
-          <p:nvPr/>
-        </p:nvSpPr>
-        <p:spPr>
-          <a:xfrm>
-            <a:off x="5510659" y="7291870"/>
-            <a:ext cx="3494633" cy="409575"/>
+          <p:cNvPr id="19" name="텍스트: 훈련이 한꺼번에"/>
+          <p:cNvSpPr txBox="1"/>
+          <p:nvPr/>
+        </p:nvSpPr>
+        <p:spPr>
+          <a:xfrm>
+            <a:off x="5561707" y="7291870"/>
+            <a:ext cx="3392537" cy="409575"/>
           </a:xfrm>
           <a:prstGeom prst="rect">
             <a:avLst/>
@@ -884,7 +1244,7 @@
                 <a:ea typeface="RCardnews W500" pitchFamily="34" charset="-127"/>
                 <a:cs typeface="RCardnews W500" pitchFamily="34" charset="-127"/>
               </a:rPr>
-              <a:t xml:space="preserve">점프·강도·빈도가</a:t>
+              <a:t xml:space="preserve">훈련이 한꺼번에</a:t>
             </a:r>
             <a:endParaRPr lang="ko-KR" altLang="en-US" sz="2700" b="0" i="0" spc="-54" kern="0" dirty="0">
               <a:solidFill>
@@ -899,14 +1259,14 @@
       </p:sp>
       <p:sp>
         <p:nvSpPr>
-          <p:cNvPr id="12" name="텍스트: 갑자기 늘면"/>
-          <p:cNvSpPr txBox="1"/>
-          <p:nvPr/>
-        </p:nvSpPr>
-        <p:spPr>
-          <a:xfrm>
-            <a:off x="5870228" y="7771840"/>
-            <a:ext cx="2775347" cy="409575"/>
+          <p:cNvPr id="20" name="텍스트: 갑자기 몰리면"/>
+          <p:cNvSpPr txBox="1"/>
+          <p:nvPr/>
+        </p:nvSpPr>
+        <p:spPr>
+          <a:xfrm>
+            <a:off x="5716042" y="7771840"/>
+            <a:ext cx="3083868" cy="409575"/>
           </a:xfrm>
           <a:prstGeom prst="rect">
             <a:avLst/>
@@ -954,7 +1314,7 @@
                 <a:ea typeface="RCardnews W500" pitchFamily="34" charset="-127"/>
                 <a:cs typeface="RCardnews W500" pitchFamily="34" charset="-127"/>
               </a:rPr>
-              <a:t xml:space="preserve"> 늘면</a:t>
+              <a:t xml:space="preserve"> 몰리면</a:t>
             </a:r>
             <a:endParaRPr lang="ko-KR" altLang="en-US" sz="2700" b="0" i="0" spc="-54" kern="0" dirty="0">
               <a:solidFill>
@@ -969,7 +1329,7 @@
       </p:sp>
       <p:sp>
         <p:nvSpPr>
-          <p:cNvPr id="13" name="텍스트: 운동량이나 강도가 갑자기 늘면"/>
+          <p:cNvPr id="21" name="텍스트: 운동량이나 강도가 갑자기 늘면"/>
           <p:cNvSpPr txBox="1"/>
           <p:nvPr/>
         </p:nvSpPr>
@@ -1028,7 +1388,7 @@
       </p:sp>
       <p:sp>
         <p:nvSpPr>
-          <p:cNvPr id="14" name="텍스트: 감당 능력을 넘어설 수 있습니다."/>
+          <p:cNvPr id="22" name="텍스트: 감당 능력을 넘어설 수 있습니다."/>
           <p:cNvSpPr txBox="1"/>
           <p:nvPr/>
         </p:nvSpPr>
@@ -1087,7 +1447,7 @@
       </p:sp>
       <p:sp>
         <p:nvSpPr>
-          <p:cNvPr id="15" name="텍스트: 문제는 운동 자체보다"/>
+          <p:cNvPr id="23" name="텍스트: 문제는 운동 자체보다"/>
           <p:cNvSpPr txBox="1"/>
           <p:nvPr/>
         </p:nvSpPr>
@@ -1146,7 +1506,7 @@
       </p:sp>
       <p:sp>
         <p:nvSpPr>
-          <p:cNvPr id="16" name="텍스트: 갑작스러운 증가일 수 있습니다"/>
+          <p:cNvPr id="24" name="텍스트: 갑작스러운 증가일 수 있습니다"/>
           <p:cNvSpPr txBox="1"/>
           <p:nvPr/>
         </p:nvSpPr>
@@ -1216,7 +1576,7 @@
       </p:sp>
       <p:sp>
         <p:nvSpPr>
-          <p:cNvPr id="17" name="텍스트: 참고: Cook et al., Br J Sp"/>
+          <p:cNvPr id="25" name="텍스트: 참고: Cook et al., Br J Sp"/>
           <p:cNvSpPr txBox="1"/>
           <p:nvPr/>
         </p:nvSpPr>

--- a/content/patellar-tendinopathy-loading/delivery/patellar-tendinopathy-loading.pptx
+++ b/content/patellar-tendinopathy-loading/delivery/patellar-tendinopathy-loading.pptx
@@ -389,7 +389,7 @@
       </p:grpSpPr>
       <p:pic>
         <p:nvPicPr>
-          <p:cNvPr id="2" name="사진" descr="적당히 찬 물컵과 훈련이 몰려 넘치는 물컵"/>
+          <p:cNvPr id="2" name="사진" descr="훈련 두 가지가 담긴 컵과, 훈련 네 가지가 몰려 통증이 넘치는 컵"/>
           <p:cNvPicPr>
             <a:picLocks noChangeAspect="1"/>
           </p:cNvPicPr>
@@ -403,8 +403,8 @@
         </p:blipFill>
         <p:spPr>
           <a:xfrm>
-            <a:off x="914400" y="4137571"/>
-            <a:ext cx="8458200" cy="2952750"/>
+            <a:off x="914400" y="3215580"/>
+            <a:ext cx="8458200" cy="4000500"/>
           </a:xfrm>
           <a:prstGeom prst="rect">
             <a:avLst/>
@@ -413,162 +413,7 @@
       </p:pic>
       <p:sp>
         <p:nvSpPr>
-          <p:cNvPr id="3" name="연한 박스"/>
-          <p:cNvSpPr/>
-          <p:nvPr/>
-        </p:nvSpPr>
-        <p:spPr>
-          <a:xfrm>
-            <a:off x="6162675" y="4423321"/>
-            <a:ext cx="1954560" cy="560040"/>
-          </a:xfrm>
-          <a:prstGeom prst="roundRect">
-            <a:avLst>
-              <a:gd name="adj" fmla="val 20409"/>
-            </a:avLst>
-          </a:prstGeom>
-          <a:solidFill>
-            <a:srgbClr val="0879D8"/>
-          </a:solidFill>
-          <a:ln>
-            <a:noFill/>
-          </a:ln>
-        </p:spPr>
-        <p:txBody>
-          <a:bodyPr rtlCol="0" anchor="ctr"/>
-          <a:lstStyle/>
-          <a:p>
-            <a:endParaRPr lang="ko-KR"/>
-          </a:p>
-        </p:txBody>
-      </p:sp>
-      <p:sp>
-        <p:nvSpPr>
-          <p:cNvPr id="4" name="연한 박스"/>
-          <p:cNvSpPr/>
-          <p:nvPr/>
-        </p:nvSpPr>
-        <p:spPr>
-          <a:xfrm>
-            <a:off x="6743700" y="3947071"/>
-            <a:ext cx="953393" cy="560040"/>
-          </a:xfrm>
-          <a:prstGeom prst="roundRect">
-            <a:avLst>
-              <a:gd name="adj" fmla="val 20409"/>
-            </a:avLst>
-          </a:prstGeom>
-          <a:solidFill>
-            <a:srgbClr val="0879D8"/>
-          </a:solidFill>
-          <a:ln>
-            <a:noFill/>
-          </a:ln>
-        </p:spPr>
-        <p:txBody>
-          <a:bodyPr rtlCol="0" anchor="ctr"/>
-          <a:lstStyle/>
-          <a:p>
-            <a:endParaRPr lang="ko-KR"/>
-          </a:p>
-        </p:txBody>
-      </p:sp>
-      <p:sp>
-        <p:nvSpPr>
-          <p:cNvPr id="5" name="연한 박스"/>
-          <p:cNvSpPr/>
-          <p:nvPr/>
-        </p:nvSpPr>
-        <p:spPr>
-          <a:xfrm>
-            <a:off x="5162550" y="5204371"/>
-            <a:ext cx="1258491" cy="560040"/>
-          </a:xfrm>
-          <a:prstGeom prst="roundRect">
-            <a:avLst>
-              <a:gd name="adj" fmla="val 20409"/>
-            </a:avLst>
-          </a:prstGeom>
-          <a:solidFill>
-            <a:srgbClr val="0879D8"/>
-          </a:solidFill>
-          <a:ln>
-            <a:noFill/>
-          </a:ln>
-        </p:spPr>
-        <p:txBody>
-          <a:bodyPr rtlCol="0" anchor="ctr"/>
-          <a:lstStyle/>
-          <a:p>
-            <a:endParaRPr lang="ko-KR"/>
-          </a:p>
-        </p:txBody>
-      </p:sp>
-      <p:sp>
-        <p:nvSpPr>
-          <p:cNvPr id="6" name="연한 박스"/>
-          <p:cNvSpPr/>
-          <p:nvPr/>
-        </p:nvSpPr>
-        <p:spPr>
-          <a:xfrm>
-            <a:off x="8020050" y="5623471"/>
-            <a:ext cx="1258491" cy="560040"/>
-          </a:xfrm>
-          <a:prstGeom prst="roundRect">
-            <a:avLst>
-              <a:gd name="adj" fmla="val 20409"/>
-            </a:avLst>
-          </a:prstGeom>
-          <a:solidFill>
-            <a:srgbClr val="0879D8"/>
-          </a:solidFill>
-          <a:ln>
-            <a:noFill/>
-          </a:ln>
-        </p:spPr>
-        <p:txBody>
-          <a:bodyPr rtlCol="0" anchor="ctr"/>
-          <a:lstStyle/>
-          <a:p>
-            <a:endParaRPr lang="ko-KR"/>
-          </a:p>
-        </p:txBody>
-      </p:sp>
-      <p:sp>
-        <p:nvSpPr>
-          <p:cNvPr id="7" name="연한 박스"/>
-          <p:cNvSpPr/>
-          <p:nvPr/>
-        </p:nvSpPr>
-        <p:spPr>
-          <a:xfrm>
-            <a:off x="4038600" y="3985171"/>
-            <a:ext cx="2067818" cy="647700"/>
-          </a:xfrm>
-          <a:prstGeom prst="roundRect">
-            <a:avLst>
-              <a:gd name="adj" fmla="val 58824"/>
-            </a:avLst>
-          </a:prstGeom>
-          <a:solidFill>
-            <a:srgbClr val="CC414A"/>
-          </a:solidFill>
-          <a:ln>
-            <a:noFill/>
-          </a:ln>
-        </p:spPr>
-        <p:txBody>
-          <a:bodyPr rtlCol="0" anchor="ctr"/>
-          <a:lstStyle/>
-          <a:p>
-            <a:endParaRPr lang="ko-KR"/>
-          </a:p>
-        </p:txBody>
-      </p:sp>
-      <p:sp>
-        <p:nvSpPr>
-          <p:cNvPr id="8" name="B01 프레임"/>
+          <p:cNvPr id="3" name="B01 프레임"/>
           <p:cNvSpPr/>
           <p:nvPr/>
         </p:nvSpPr>
@@ -599,14 +444,14 @@
       </p:sp>
       <p:sp>
         <p:nvSpPr>
-          <p:cNvPr id="9" name="텍스트: 힘줄에도"/>
-          <p:cNvSpPr txBox="1"/>
-          <p:nvPr/>
-        </p:nvSpPr>
-        <p:spPr>
-          <a:xfrm>
-            <a:off x="3155752" y="1029081"/>
-            <a:ext cx="3975497" cy="962025"/>
+          <p:cNvPr id="4" name="텍스트: 힘줄에도 감당할 수 있는"/>
+          <p:cNvSpPr txBox="1"/>
+          <p:nvPr/>
+        </p:nvSpPr>
+        <p:spPr>
+          <a:xfrm>
+            <a:off x="737443" y="1029081"/>
+            <a:ext cx="8812113" cy="962025"/>
           </a:xfrm>
           <a:prstGeom prst="rect">
             <a:avLst/>
@@ -643,7 +488,7 @@
                 <a:ea typeface="RCardnews W850" pitchFamily="34" charset="-127"/>
                 <a:cs typeface="RCardnews W850" pitchFamily="34" charset="-127"/>
               </a:rPr>
-              <a:t xml:space="preserve">힘줄에도</a:t>
+              <a:t xml:space="preserve">힘줄에도 감당할 수 있는</a:t>
             </a:r>
             <a:endParaRPr lang="ko-KR" altLang="en-US" sz="6300" b="0" i="0" spc="-220" kern="0" dirty="0">
               <a:solidFill>
@@ -658,14 +503,14 @@
       </p:sp>
       <p:sp>
         <p:nvSpPr>
-          <p:cNvPr id="10" name="텍스트: 감당할 수 있는"/>
-          <p:cNvSpPr txBox="1"/>
-          <p:nvPr/>
-        </p:nvSpPr>
-        <p:spPr>
-          <a:xfrm>
-            <a:off x="2251621" y="1989171"/>
-            <a:ext cx="5783610" cy="962025"/>
+          <p:cNvPr id="5" name="텍스트: 부하가 있습니다"/>
+          <p:cNvSpPr txBox="1"/>
+          <p:nvPr/>
+        </p:nvSpPr>
+        <p:spPr>
+          <a:xfrm>
+            <a:off x="1995636" y="1989171"/>
+            <a:ext cx="6295727" cy="962025"/>
           </a:xfrm>
           <a:prstGeom prst="rect">
             <a:avLst/>
@@ -696,13 +541,24 @@
             <a:r>
               <a:rPr lang="ko-KR" altLang="en-US" sz="6300" b="0" i="0" spc="-220" kern="0" dirty="0">
                 <a:solidFill>
-                  <a:srgbClr val="121416"/>
+                  <a:srgbClr val="0879D8"/>
                 </a:solidFill>
                 <a:latin typeface="RCardnews W850" pitchFamily="34" charset="-127"/>
                 <a:ea typeface="RCardnews W850" pitchFamily="34" charset="-127"/>
                 <a:cs typeface="RCardnews W850" pitchFamily="34" charset="-127"/>
               </a:rPr>
-              <a:t xml:space="preserve">감당할 수 있는</a:t>
+              <a:t xml:space="preserve">부하</a:t>
+            </a:r>
+            <a:r>
+              <a:rPr lang="ko-KR" altLang="en-US" sz="6300" b="0" i="0" spc="-220" kern="0" dirty="0">
+                <a:solidFill>
+                  <a:srgbClr val="121416"/>
+                </a:solidFill>
+                <a:latin typeface="RCardnews W850" pitchFamily="34" charset="-127"/>
+                <a:ea typeface="RCardnews W850" pitchFamily="34" charset="-127"/>
+                <a:cs typeface="RCardnews W850" pitchFamily="34" charset="-127"/>
+              </a:rPr>
+              <a:t xml:space="preserve">가 있습니다</a:t>
             </a:r>
             <a:endParaRPr lang="ko-KR" altLang="en-US" sz="6300" b="0" i="0" spc="-220" kern="0" dirty="0">
               <a:solidFill>
@@ -717,66 +573,409 @@
       </p:sp>
       <p:sp>
         <p:nvSpPr>
-          <p:cNvPr id="11" name="텍스트: 부하가 있습니다"/>
-          <p:cNvSpPr txBox="1"/>
-          <p:nvPr/>
-        </p:nvSpPr>
-        <p:spPr>
-          <a:xfrm>
-            <a:off x="1995636" y="2949261"/>
-            <a:ext cx="6295727" cy="962025"/>
-          </a:xfrm>
-          <a:prstGeom prst="rect">
-            <a:avLst/>
-          </a:prstGeom>
-          <a:noFill/>
-          <a:ln>
-            <a:noFill/>
-          </a:ln>
-        </p:spPr>
-        <p:txBody>
-          <a:bodyPr vert="horz" wrap="none" lIns="0" tIns="0" rIns="0" bIns="0" rtlCol="0" anchor="ctr" anchorCtr="0">
-            <a:noAutofit/>
-          </a:bodyPr>
-          <a:lstStyle/>
-          <a:p>
-            <a:pPr algn="ctr">
-              <a:lnSpc>
-                <a:spcPct val="100000"/>
-              </a:lnSpc>
-              <a:spcBef>
-                <a:spcPts val="0"/>
-              </a:spcBef>
-              <a:spcAft>
-                <a:spcPts val="0"/>
-              </a:spcAft>
-              <a:buNone/>
-            </a:pPr>
-            <a:r>
-              <a:rPr lang="ko-KR" altLang="en-US" sz="6300" b="0" i="0" spc="-220" kern="0" dirty="0">
-                <a:solidFill>
-                  <a:srgbClr val="0879D8"/>
+          <p:cNvPr id="6" name="텍스트: 장거리"/>
+          <p:cNvSpPr txBox="1"/>
+          <p:nvPr/>
+        </p:nvSpPr>
+        <p:spPr>
+          <a:xfrm>
+            <a:off x="1999655" y="6213610"/>
+            <a:ext cx="2058591" cy="409575"/>
+          </a:xfrm>
+          <a:prstGeom prst="rect">
+            <a:avLst/>
+          </a:prstGeom>
+          <a:noFill/>
+          <a:ln>
+            <a:noFill/>
+          </a:ln>
+        </p:spPr>
+        <p:txBody>
+          <a:bodyPr vert="horz" wrap="none" lIns="0" tIns="0" rIns="0" bIns="0" rtlCol="0" anchor="ctr" anchorCtr="0">
+            <a:noAutofit/>
+          </a:bodyPr>
+          <a:lstStyle/>
+          <a:p>
+            <a:pPr algn="ctr">
+              <a:lnSpc>
+                <a:spcPct val="100000"/>
+              </a:lnSpc>
+              <a:spcBef>
+                <a:spcPts val="0"/>
+              </a:spcBef>
+              <a:spcAft>
+                <a:spcPts val="0"/>
+              </a:spcAft>
+              <a:buNone/>
+            </a:pPr>
+            <a:r>
+              <a:rPr lang="ko-KR" altLang="en-US" sz="2700" b="0" i="0" spc="-81" kern="0" dirty="0">
+                <a:solidFill>
+                  <a:srgbClr val="FFFFFF"/>
+                </a:solidFill>
+                <a:latin typeface="RCardnews W750" pitchFamily="34" charset="-127"/>
+                <a:ea typeface="RCardnews W750" pitchFamily="34" charset="-127"/>
+                <a:cs typeface="RCardnews W750" pitchFamily="34" charset="-127"/>
+              </a:rPr>
+              <a:t xml:space="preserve">장거리</a:t>
+            </a:r>
+            <a:endParaRPr lang="ko-KR" altLang="en-US" sz="2700" b="0" i="0" spc="-81" kern="0" dirty="0">
+              <a:solidFill>
+                <a:srgbClr val="FFFFFF"/>
+              </a:solidFill>
+              <a:latin typeface="RCardnews W750" pitchFamily="34" charset="-127"/>
+              <a:ea typeface="RCardnews W750" pitchFamily="34" charset="-127"/>
+              <a:cs typeface="RCardnews W750" pitchFamily="34" charset="-127"/>
+            </a:endParaRPr>
+          </a:p>
+        </p:txBody>
+      </p:sp>
+      <p:sp>
+        <p:nvSpPr>
+          <p:cNvPr id="7" name="텍스트: 템포"/>
+          <p:cNvSpPr txBox="1"/>
+          <p:nvPr/>
+        </p:nvSpPr>
+        <p:spPr>
+          <a:xfrm>
+            <a:off x="2152204" y="5569779"/>
+            <a:ext cx="1753493" cy="409575"/>
+          </a:xfrm>
+          <a:prstGeom prst="rect">
+            <a:avLst/>
+          </a:prstGeom>
+          <a:noFill/>
+          <a:ln>
+            <a:noFill/>
+          </a:ln>
+        </p:spPr>
+        <p:txBody>
+          <a:bodyPr vert="horz" wrap="none" lIns="0" tIns="0" rIns="0" bIns="0" rtlCol="0" anchor="ctr" anchorCtr="0">
+            <a:noAutofit/>
+          </a:bodyPr>
+          <a:lstStyle/>
+          <a:p>
+            <a:pPr algn="ctr">
+              <a:lnSpc>
+                <a:spcPct val="100000"/>
+              </a:lnSpc>
+              <a:spcBef>
+                <a:spcPts val="0"/>
+              </a:spcBef>
+              <a:spcAft>
+                <a:spcPts val="0"/>
+              </a:spcAft>
+              <a:buNone/>
+            </a:pPr>
+            <a:r>
+              <a:rPr lang="ko-KR" altLang="en-US" sz="2700" b="0" i="0" spc="-81" kern="0" dirty="0">
+                <a:solidFill>
+                  <a:srgbClr val="FFFFFF"/>
+                </a:solidFill>
+                <a:latin typeface="RCardnews W750" pitchFamily="34" charset="-127"/>
+                <a:ea typeface="RCardnews W750" pitchFamily="34" charset="-127"/>
+                <a:cs typeface="RCardnews W750" pitchFamily="34" charset="-127"/>
+              </a:rPr>
+              <a:t xml:space="preserve">템포</a:t>
+            </a:r>
+            <a:endParaRPr lang="ko-KR" altLang="en-US" sz="2700" b="0" i="0" spc="-81" kern="0" dirty="0">
+              <a:solidFill>
+                <a:srgbClr val="FFFFFF"/>
+              </a:solidFill>
+              <a:latin typeface="RCardnews W750" pitchFamily="34" charset="-127"/>
+              <a:ea typeface="RCardnews W750" pitchFamily="34" charset="-127"/>
+              <a:cs typeface="RCardnews W750" pitchFamily="34" charset="-127"/>
+            </a:endParaRPr>
+          </a:p>
+        </p:txBody>
+      </p:sp>
+      <p:sp>
+        <p:nvSpPr>
+          <p:cNvPr id="8" name="텍스트: 장거리"/>
+          <p:cNvSpPr txBox="1"/>
+          <p:nvPr/>
+        </p:nvSpPr>
+        <p:spPr>
+          <a:xfrm>
+            <a:off x="6228755" y="6213610"/>
+            <a:ext cx="2058591" cy="409575"/>
+          </a:xfrm>
+          <a:prstGeom prst="rect">
+            <a:avLst/>
+          </a:prstGeom>
+          <a:noFill/>
+          <a:ln>
+            <a:noFill/>
+          </a:ln>
+        </p:spPr>
+        <p:txBody>
+          <a:bodyPr vert="horz" wrap="none" lIns="0" tIns="0" rIns="0" bIns="0" rtlCol="0" anchor="ctr" anchorCtr="0">
+            <a:noAutofit/>
+          </a:bodyPr>
+          <a:lstStyle/>
+          <a:p>
+            <a:pPr algn="ctr">
+              <a:lnSpc>
+                <a:spcPct val="100000"/>
+              </a:lnSpc>
+              <a:spcBef>
+                <a:spcPts val="0"/>
+              </a:spcBef>
+              <a:spcAft>
+                <a:spcPts val="0"/>
+              </a:spcAft>
+              <a:buNone/>
+            </a:pPr>
+            <a:r>
+              <a:rPr lang="ko-KR" altLang="en-US" sz="2700" b="0" i="0" spc="-81" kern="0" dirty="0">
+                <a:solidFill>
+                  <a:srgbClr val="FFFFFF"/>
+                </a:solidFill>
+                <a:latin typeface="RCardnews W750" pitchFamily="34" charset="-127"/>
+                <a:ea typeface="RCardnews W750" pitchFamily="34" charset="-127"/>
+                <a:cs typeface="RCardnews W750" pitchFamily="34" charset="-127"/>
+              </a:rPr>
+              <a:t xml:space="preserve">장거리</a:t>
+            </a:r>
+            <a:endParaRPr lang="ko-KR" altLang="en-US" sz="2700" b="0" i="0" spc="-81" kern="0" dirty="0">
+              <a:solidFill>
+                <a:srgbClr val="FFFFFF"/>
+              </a:solidFill>
+              <a:latin typeface="RCardnews W750" pitchFamily="34" charset="-127"/>
+              <a:ea typeface="RCardnews W750" pitchFamily="34" charset="-127"/>
+              <a:cs typeface="RCardnews W750" pitchFamily="34" charset="-127"/>
+            </a:endParaRPr>
+          </a:p>
+        </p:txBody>
+      </p:sp>
+      <p:sp>
+        <p:nvSpPr>
+          <p:cNvPr id="9" name="텍스트: 템포"/>
+          <p:cNvSpPr txBox="1"/>
+          <p:nvPr/>
+        </p:nvSpPr>
+        <p:spPr>
+          <a:xfrm>
+            <a:off x="6381304" y="5569779"/>
+            <a:ext cx="1753493" cy="409575"/>
+          </a:xfrm>
+          <a:prstGeom prst="rect">
+            <a:avLst/>
+          </a:prstGeom>
+          <a:noFill/>
+          <a:ln>
+            <a:noFill/>
+          </a:ln>
+        </p:spPr>
+        <p:txBody>
+          <a:bodyPr vert="horz" wrap="none" lIns="0" tIns="0" rIns="0" bIns="0" rtlCol="0" anchor="ctr" anchorCtr="0">
+            <a:noAutofit/>
+          </a:bodyPr>
+          <a:lstStyle/>
+          <a:p>
+            <a:pPr algn="ctr">
+              <a:lnSpc>
+                <a:spcPct val="100000"/>
+              </a:lnSpc>
+              <a:spcBef>
+                <a:spcPts val="0"/>
+              </a:spcBef>
+              <a:spcAft>
+                <a:spcPts val="0"/>
+              </a:spcAft>
+              <a:buNone/>
+            </a:pPr>
+            <a:r>
+              <a:rPr lang="ko-KR" altLang="en-US" sz="2700" b="0" i="0" spc="-81" kern="0" dirty="0">
+                <a:solidFill>
+                  <a:srgbClr val="FFFFFF"/>
+                </a:solidFill>
+                <a:latin typeface="RCardnews W750" pitchFamily="34" charset="-127"/>
+                <a:ea typeface="RCardnews W750" pitchFamily="34" charset="-127"/>
+                <a:cs typeface="RCardnews W750" pitchFamily="34" charset="-127"/>
+              </a:rPr>
+              <a:t xml:space="preserve">템포</a:t>
+            </a:r>
+            <a:endParaRPr lang="ko-KR" altLang="en-US" sz="2700" b="0" i="0" spc="-81" kern="0" dirty="0">
+              <a:solidFill>
+                <a:srgbClr val="FFFFFF"/>
+              </a:solidFill>
+              <a:latin typeface="RCardnews W750" pitchFamily="34" charset="-127"/>
+              <a:ea typeface="RCardnews W750" pitchFamily="34" charset="-127"/>
+              <a:cs typeface="RCardnews W750" pitchFamily="34" charset="-127"/>
+            </a:endParaRPr>
+          </a:p>
+        </p:txBody>
+      </p:sp>
+      <p:sp>
+        <p:nvSpPr>
+          <p:cNvPr id="10" name="텍스트: 인터벌"/>
+          <p:cNvSpPr txBox="1"/>
+          <p:nvPr/>
+        </p:nvSpPr>
+        <p:spPr>
+          <a:xfrm>
+            <a:off x="6228755" y="4924907"/>
+            <a:ext cx="2058591" cy="409575"/>
+          </a:xfrm>
+          <a:prstGeom prst="rect">
+            <a:avLst/>
+          </a:prstGeom>
+          <a:noFill/>
+          <a:ln>
+            <a:noFill/>
+          </a:ln>
+        </p:spPr>
+        <p:txBody>
+          <a:bodyPr vert="horz" wrap="none" lIns="0" tIns="0" rIns="0" bIns="0" rtlCol="0" anchor="ctr" anchorCtr="0">
+            <a:noAutofit/>
+          </a:bodyPr>
+          <a:lstStyle/>
+          <a:p>
+            <a:pPr algn="ctr">
+              <a:lnSpc>
+                <a:spcPct val="100000"/>
+              </a:lnSpc>
+              <a:spcBef>
+                <a:spcPts val="0"/>
+              </a:spcBef>
+              <a:spcAft>
+                <a:spcPts val="0"/>
+              </a:spcAft>
+              <a:buNone/>
+            </a:pPr>
+            <a:r>
+              <a:rPr lang="ko-KR" altLang="en-US" sz="2700" b="0" i="0" spc="-81" kern="0" dirty="0">
+                <a:solidFill>
+                  <a:srgbClr val="0B3A63"/>
+                </a:solidFill>
+                <a:latin typeface="RCardnews W750" pitchFamily="34" charset="-127"/>
+                <a:ea typeface="RCardnews W750" pitchFamily="34" charset="-127"/>
+                <a:cs typeface="RCardnews W750" pitchFamily="34" charset="-127"/>
+              </a:rPr>
+              <a:t xml:space="preserve">인터벌</a:t>
+            </a:r>
+            <a:endParaRPr lang="ko-KR" altLang="en-US" sz="2700" b="0" i="0" spc="-81" kern="0" dirty="0">
+              <a:solidFill>
+                <a:srgbClr val="0B3A63"/>
+              </a:solidFill>
+              <a:latin typeface="RCardnews W750" pitchFamily="34" charset="-127"/>
+              <a:ea typeface="RCardnews W750" pitchFamily="34" charset="-127"/>
+              <a:cs typeface="RCardnews W750" pitchFamily="34" charset="-127"/>
+            </a:endParaRPr>
+          </a:p>
+        </p:txBody>
+      </p:sp>
+      <p:sp>
+        <p:nvSpPr>
+          <p:cNvPr id="11" name="텍스트: 무리한 대회"/>
+          <p:cNvSpPr txBox="1"/>
+          <p:nvPr/>
+        </p:nvSpPr>
+        <p:spPr>
+          <a:xfrm>
+            <a:off x="5880646" y="4382875"/>
+            <a:ext cx="2754660" cy="409575"/>
+          </a:xfrm>
+          <a:prstGeom prst="rect">
+            <a:avLst/>
+          </a:prstGeom>
+          <a:noFill/>
+          <a:ln>
+            <a:noFill/>
+          </a:ln>
+        </p:spPr>
+        <p:txBody>
+          <a:bodyPr vert="horz" wrap="none" lIns="0" tIns="0" rIns="0" bIns="0" rtlCol="0" anchor="ctr" anchorCtr="0">
+            <a:noAutofit/>
+          </a:bodyPr>
+          <a:lstStyle/>
+          <a:p>
+            <a:pPr algn="ctr">
+              <a:lnSpc>
+                <a:spcPct val="100000"/>
+              </a:lnSpc>
+              <a:spcBef>
+                <a:spcPts val="0"/>
+              </a:spcBef>
+              <a:spcAft>
+                <a:spcPts val="0"/>
+              </a:spcAft>
+              <a:buNone/>
+            </a:pPr>
+            <a:r>
+              <a:rPr lang="ko-KR" altLang="en-US" sz="2700" b="0" i="0" spc="-81" kern="0" dirty="0">
+                <a:solidFill>
+                  <a:srgbClr val="0B3A63"/>
+                </a:solidFill>
+                <a:latin typeface="RCardnews W750" pitchFamily="34" charset="-127"/>
+                <a:ea typeface="RCardnews W750" pitchFamily="34" charset="-127"/>
+                <a:cs typeface="RCardnews W750" pitchFamily="34" charset="-127"/>
+              </a:rPr>
+              <a:t xml:space="preserve">무리한 대회</a:t>
+            </a:r>
+            <a:endParaRPr lang="ko-KR" altLang="en-US" sz="2700" b="0" i="0" spc="-81" kern="0" dirty="0">
+              <a:solidFill>
+                <a:srgbClr val="0B3A63"/>
+              </a:solidFill>
+              <a:latin typeface="RCardnews W750" pitchFamily="34" charset="-127"/>
+              <a:ea typeface="RCardnews W750" pitchFamily="34" charset="-127"/>
+              <a:cs typeface="RCardnews W750" pitchFamily="34" charset="-127"/>
+            </a:endParaRPr>
+          </a:p>
+        </p:txBody>
+      </p:sp>
+      <p:sp>
+        <p:nvSpPr>
+          <p:cNvPr id="12" name="텍스트: 통증!"/>
+          <p:cNvSpPr txBox="1"/>
+          <p:nvPr/>
+        </p:nvSpPr>
+        <p:spPr>
+          <a:xfrm>
+            <a:off x="6196757" y="3618208"/>
+            <a:ext cx="2122438" cy="552450"/>
+          </a:xfrm>
+          <a:prstGeom prst="rect">
+            <a:avLst/>
+          </a:prstGeom>
+          <a:noFill/>
+          <a:ln>
+            <a:noFill/>
+          </a:ln>
+        </p:spPr>
+        <p:txBody>
+          <a:bodyPr vert="horz" wrap="none" lIns="0" tIns="0" rIns="0" bIns="0" rtlCol="0" anchor="ctr" anchorCtr="0">
+            <a:noAutofit/>
+          </a:bodyPr>
+          <a:lstStyle/>
+          <a:p>
+            <a:pPr algn="ctr">
+              <a:lnSpc>
+                <a:spcPct val="100000"/>
+              </a:lnSpc>
+              <a:spcBef>
+                <a:spcPts val="0"/>
+              </a:spcBef>
+              <a:spcAft>
+                <a:spcPts val="0"/>
+              </a:spcAft>
+              <a:buNone/>
+            </a:pPr>
+            <a:r>
+              <a:rPr lang="ko-KR" altLang="en-US" sz="3600" b="0" i="0" spc="-108" kern="0" dirty="0">
+                <a:solidFill>
+                  <a:srgbClr val="FFFFFF"/>
                 </a:solidFill>
                 <a:latin typeface="RCardnews W850" pitchFamily="34" charset="-127"/>
                 <a:ea typeface="RCardnews W850" pitchFamily="34" charset="-127"/>
                 <a:cs typeface="RCardnews W850" pitchFamily="34" charset="-127"/>
               </a:rPr>
-              <a:t xml:space="preserve">부하</a:t>
-            </a:r>
-            <a:r>
-              <a:rPr lang="ko-KR" altLang="en-US" sz="6300" b="0" i="0" spc="-220" kern="0" dirty="0">
-                <a:solidFill>
-                  <a:srgbClr val="121416"/>
-                </a:solidFill>
-                <a:latin typeface="RCardnews W850" pitchFamily="34" charset="-127"/>
-                <a:ea typeface="RCardnews W850" pitchFamily="34" charset="-127"/>
-                <a:cs typeface="RCardnews W850" pitchFamily="34" charset="-127"/>
-              </a:rPr>
-              <a:t xml:space="preserve">가 있습니다</a:t>
-            </a:r>
-            <a:endParaRPr lang="ko-KR" altLang="en-US" sz="6300" b="0" i="0" spc="-220" kern="0" dirty="0">
-              <a:solidFill>
-                <a:srgbClr val="121416"/>
+              <a:t xml:space="preserve">통증!</a:t>
+            </a:r>
+            <a:endParaRPr lang="ko-KR" altLang="en-US" sz="3600" b="0" i="0" spc="-108" kern="0" dirty="0">
+              <a:solidFill>
+                <a:srgbClr val="FFFFFF"/>
               </a:solidFill>
               <a:latin typeface="RCardnews W850" pitchFamily="34" charset="-127"/>
               <a:ea typeface="RCardnews W850" pitchFamily="34" charset="-127"/>
@@ -787,55 +986,265 @@
       </p:sp>
       <p:sp>
         <p:nvSpPr>
-          <p:cNvPr id="12" name="텍스트: 무리한 대회"/>
-          <p:cNvSpPr txBox="1"/>
-          <p:nvPr/>
-        </p:nvSpPr>
-        <p:spPr>
-          <a:xfrm>
-            <a:off x="5762625" y="4510570"/>
-            <a:ext cx="2754660" cy="409575"/>
-          </a:xfrm>
-          <a:prstGeom prst="rect">
-            <a:avLst/>
-          </a:prstGeom>
-          <a:noFill/>
-          <a:ln>
-            <a:noFill/>
-          </a:ln>
-        </p:spPr>
-        <p:txBody>
-          <a:bodyPr vert="horz" wrap="none" lIns="0" tIns="0" rIns="0" bIns="0" rtlCol="0" anchor="ctr" anchorCtr="0">
-            <a:noAutofit/>
-          </a:bodyPr>
-          <a:lstStyle/>
-          <a:p>
-            <a:pPr algn="ctr">
-              <a:lnSpc>
-                <a:spcPct val="100000"/>
-              </a:lnSpc>
-              <a:spcBef>
-                <a:spcPts val="0"/>
-              </a:spcBef>
-              <a:spcAft>
-                <a:spcPts val="0"/>
-              </a:spcAft>
-              <a:buNone/>
-            </a:pPr>
-            <a:r>
-              <a:rPr lang="ko-KR" altLang="en-US" sz="2700" b="0" i="0" spc="-81" kern="0" dirty="0">
-                <a:solidFill>
-                  <a:srgbClr val="FFFFFF"/>
+          <p:cNvPr id="13" name="텍스트: 컵 = 감당할 수 있는 능력"/>
+          <p:cNvSpPr txBox="1"/>
+          <p:nvPr/>
+        </p:nvSpPr>
+        <p:spPr>
+          <a:xfrm>
+            <a:off x="751433" y="7417629"/>
+            <a:ext cx="4554885" cy="409575"/>
+          </a:xfrm>
+          <a:prstGeom prst="rect">
+            <a:avLst/>
+          </a:prstGeom>
+          <a:noFill/>
+          <a:ln>
+            <a:noFill/>
+          </a:ln>
+        </p:spPr>
+        <p:txBody>
+          <a:bodyPr vert="horz" wrap="none" lIns="0" tIns="0" rIns="0" bIns="0" rtlCol="0" anchor="ctr" anchorCtr="0">
+            <a:noAutofit/>
+          </a:bodyPr>
+          <a:lstStyle/>
+          <a:p>
+            <a:pPr algn="ctr">
+              <a:lnSpc>
+                <a:spcPct val="100000"/>
+              </a:lnSpc>
+              <a:spcBef>
+                <a:spcPts val="0"/>
+              </a:spcBef>
+              <a:spcAft>
+                <a:spcPts val="0"/>
+              </a:spcAft>
+              <a:buNone/>
+            </a:pPr>
+            <a:r>
+              <a:rPr lang="ko-KR" altLang="en-US" sz="2700" b="0" i="0" spc="-54" kern="0" dirty="0">
+                <a:solidFill>
+                  <a:srgbClr val="5E6570"/>
+                </a:solidFill>
+                <a:latin typeface="RCardnews W500" pitchFamily="34" charset="-127"/>
+                <a:ea typeface="RCardnews W500" pitchFamily="34" charset="-127"/>
+                <a:cs typeface="RCardnews W500" pitchFamily="34" charset="-127"/>
+              </a:rPr>
+              <a:t xml:space="preserve">컵 = 감당할 수 있는 능력</a:t>
+            </a:r>
+            <a:endParaRPr lang="ko-KR" altLang="en-US" sz="2700" b="0" i="0" spc="-54" kern="0" dirty="0">
+              <a:solidFill>
+                <a:srgbClr val="5E6570"/>
+              </a:solidFill>
+              <a:latin typeface="RCardnews W500" pitchFamily="34" charset="-127"/>
+              <a:ea typeface="RCardnews W500" pitchFamily="34" charset="-127"/>
+              <a:cs typeface="RCardnews W500" pitchFamily="34" charset="-127"/>
+            </a:endParaRPr>
+          </a:p>
+        </p:txBody>
+      </p:sp>
+      <p:sp>
+        <p:nvSpPr>
+          <p:cNvPr id="14" name="텍스트: 담긴 것 = 훈련"/>
+          <p:cNvSpPr txBox="1"/>
+          <p:nvPr/>
+        </p:nvSpPr>
+        <p:spPr>
+          <a:xfrm>
+            <a:off x="1457771" y="7897600"/>
+            <a:ext cx="3142208" cy="409575"/>
+          </a:xfrm>
+          <a:prstGeom prst="rect">
+            <a:avLst/>
+          </a:prstGeom>
+          <a:noFill/>
+          <a:ln>
+            <a:noFill/>
+          </a:ln>
+        </p:spPr>
+        <p:txBody>
+          <a:bodyPr vert="horz" wrap="none" lIns="0" tIns="0" rIns="0" bIns="0" rtlCol="0" anchor="ctr" anchorCtr="0">
+            <a:noAutofit/>
+          </a:bodyPr>
+          <a:lstStyle/>
+          <a:p>
+            <a:pPr algn="ctr">
+              <a:lnSpc>
+                <a:spcPct val="100000"/>
+              </a:lnSpc>
+              <a:spcBef>
+                <a:spcPts val="0"/>
+              </a:spcBef>
+              <a:spcAft>
+                <a:spcPts val="0"/>
+              </a:spcAft>
+              <a:buNone/>
+            </a:pPr>
+            <a:r>
+              <a:rPr lang="ko-KR" altLang="en-US" sz="2700" b="0" i="0" spc="-54" kern="0" dirty="0">
+                <a:solidFill>
+                  <a:srgbClr val="5E6570"/>
+                </a:solidFill>
+                <a:latin typeface="RCardnews W500" pitchFamily="34" charset="-127"/>
+                <a:ea typeface="RCardnews W500" pitchFamily="34" charset="-127"/>
+                <a:cs typeface="RCardnews W500" pitchFamily="34" charset="-127"/>
+              </a:rPr>
+              <a:t xml:space="preserve">담긴 것 = 훈련</a:t>
+            </a:r>
+            <a:endParaRPr lang="ko-KR" altLang="en-US" sz="2700" b="0" i="0" spc="-54" kern="0" dirty="0">
+              <a:solidFill>
+                <a:srgbClr val="5E6570"/>
+              </a:solidFill>
+              <a:latin typeface="RCardnews W500" pitchFamily="34" charset="-127"/>
+              <a:ea typeface="RCardnews W500" pitchFamily="34" charset="-127"/>
+              <a:cs typeface="RCardnews W500" pitchFamily="34" charset="-127"/>
+            </a:endParaRPr>
+          </a:p>
+        </p:txBody>
+      </p:sp>
+      <p:sp>
+        <p:nvSpPr>
+          <p:cNvPr id="15" name="텍스트: 훈련이 갑자기 몰리면"/>
+          <p:cNvSpPr txBox="1"/>
+          <p:nvPr/>
+        </p:nvSpPr>
+        <p:spPr>
+          <a:xfrm>
+            <a:off x="5208538" y="7417629"/>
+            <a:ext cx="4098875" cy="409575"/>
+          </a:xfrm>
+          <a:prstGeom prst="rect">
+            <a:avLst/>
+          </a:prstGeom>
+          <a:noFill/>
+          <a:ln>
+            <a:noFill/>
+          </a:ln>
+        </p:spPr>
+        <p:txBody>
+          <a:bodyPr vert="horz" wrap="none" lIns="0" tIns="0" rIns="0" bIns="0" rtlCol="0" anchor="ctr" anchorCtr="0">
+            <a:noAutofit/>
+          </a:bodyPr>
+          <a:lstStyle/>
+          <a:p>
+            <a:pPr algn="ctr">
+              <a:lnSpc>
+                <a:spcPct val="100000"/>
+              </a:lnSpc>
+              <a:spcBef>
+                <a:spcPts val="0"/>
+              </a:spcBef>
+              <a:spcAft>
+                <a:spcPts val="0"/>
+              </a:spcAft>
+              <a:buNone/>
+            </a:pPr>
+            <a:r>
+              <a:rPr lang="ko-KR" altLang="en-US" sz="2700" b="0" i="0" spc="-54" kern="0" dirty="0">
+                <a:solidFill>
+                  <a:srgbClr val="5E6570"/>
+                </a:solidFill>
+                <a:latin typeface="RCardnews W500" pitchFamily="34" charset="-127"/>
+                <a:ea typeface="RCardnews W500" pitchFamily="34" charset="-127"/>
+                <a:cs typeface="RCardnews W500" pitchFamily="34" charset="-127"/>
+              </a:rPr>
+              <a:t xml:space="preserve">훈련이 </a:t>
+            </a:r>
+            <a:r>
+              <a:rPr lang="ko-KR" altLang="en-US" sz="2700" b="0" i="0" spc="-54" kern="0" dirty="0">
+                <a:solidFill>
+                  <a:srgbClr val="0879D8"/>
                 </a:solidFill>
                 <a:latin typeface="RCardnews W750" pitchFamily="34" charset="-127"/>
                 <a:ea typeface="RCardnews W750" pitchFamily="34" charset="-127"/>
                 <a:cs typeface="RCardnews W750" pitchFamily="34" charset="-127"/>
               </a:rPr>
-              <a:t xml:space="preserve">무리한 대회</a:t>
-            </a:r>
-            <a:endParaRPr lang="ko-KR" altLang="en-US" sz="2700" b="0" i="0" spc="-81" kern="0" dirty="0">
-              <a:solidFill>
-                <a:srgbClr val="FFFFFF"/>
+              <a:t xml:space="preserve">갑자기</a:t>
+            </a:r>
+            <a:r>
+              <a:rPr lang="ko-KR" altLang="en-US" sz="2700" b="0" i="0" spc="-54" kern="0" dirty="0">
+                <a:solidFill>
+                  <a:srgbClr val="5E6570"/>
+                </a:solidFill>
+                <a:latin typeface="RCardnews W500" pitchFamily="34" charset="-127"/>
+                <a:ea typeface="RCardnews W500" pitchFamily="34" charset="-127"/>
+                <a:cs typeface="RCardnews W500" pitchFamily="34" charset="-127"/>
+              </a:rPr>
+              <a:t xml:space="preserve"> 몰리면</a:t>
+            </a:r>
+            <a:endParaRPr lang="ko-KR" altLang="en-US" sz="2700" b="0" i="0" spc="-54" kern="0" dirty="0">
+              <a:solidFill>
+                <a:srgbClr val="5E6570"/>
+              </a:solidFill>
+              <a:latin typeface="RCardnews W500" pitchFamily="34" charset="-127"/>
+              <a:ea typeface="RCardnews W500" pitchFamily="34" charset="-127"/>
+              <a:cs typeface="RCardnews W500" pitchFamily="34" charset="-127"/>
+            </a:endParaRPr>
+          </a:p>
+        </p:txBody>
+      </p:sp>
+      <p:sp>
+        <p:nvSpPr>
+          <p:cNvPr id="16" name="텍스트: 넘치는 것 = 통증"/>
+          <p:cNvSpPr txBox="1"/>
+          <p:nvPr/>
+        </p:nvSpPr>
+        <p:spPr>
+          <a:xfrm>
+            <a:off x="5532537" y="7897600"/>
+            <a:ext cx="3450878" cy="409575"/>
+          </a:xfrm>
+          <a:prstGeom prst="rect">
+            <a:avLst/>
+          </a:prstGeom>
+          <a:noFill/>
+          <a:ln>
+            <a:noFill/>
+          </a:ln>
+        </p:spPr>
+        <p:txBody>
+          <a:bodyPr vert="horz" wrap="none" lIns="0" tIns="0" rIns="0" bIns="0" rtlCol="0" anchor="ctr" anchorCtr="0">
+            <a:noAutofit/>
+          </a:bodyPr>
+          <a:lstStyle/>
+          <a:p>
+            <a:pPr algn="ctr">
+              <a:lnSpc>
+                <a:spcPct val="100000"/>
+              </a:lnSpc>
+              <a:spcBef>
+                <a:spcPts val="0"/>
+              </a:spcBef>
+              <a:spcAft>
+                <a:spcPts val="0"/>
+              </a:spcAft>
+              <a:buNone/>
+            </a:pPr>
+            <a:r>
+              <a:rPr lang="ko-KR" altLang="en-US" sz="2700" b="0" i="0" spc="-54" kern="0" dirty="0">
+                <a:solidFill>
+                  <a:srgbClr val="5E6570"/>
+                </a:solidFill>
+                <a:latin typeface="RCardnews W500" pitchFamily="34" charset="-127"/>
+                <a:ea typeface="RCardnews W500" pitchFamily="34" charset="-127"/>
+                <a:cs typeface="RCardnews W500" pitchFamily="34" charset="-127"/>
+              </a:rPr>
+              <a:t xml:space="preserve">넘치는 것 = </a:t>
+            </a:r>
+            <a:r>
+              <a:rPr lang="ko-KR" altLang="en-US" sz="2700" b="0" i="0" spc="-54" kern="0" dirty="0">
+                <a:solidFill>
+                  <a:srgbClr val="CC414A"/>
+                </a:solidFill>
+                <a:latin typeface="RCardnews W750" pitchFamily="34" charset="-127"/>
+                <a:ea typeface="RCardnews W750" pitchFamily="34" charset="-127"/>
+                <a:cs typeface="RCardnews W750" pitchFamily="34" charset="-127"/>
+              </a:rPr>
+              <a:t xml:space="preserve">통증</a:t>
+            </a:r>
+            <a:endParaRPr lang="ko-KR" altLang="en-US" sz="2700" b="0" i="0" spc="-54" kern="0" dirty="0">
+              <a:solidFill>
+                <a:srgbClr val="CC414A"/>
               </a:solidFill>
               <a:latin typeface="RCardnews W750" pitchFamily="34" charset="-127"/>
               <a:ea typeface="RCardnews W750" pitchFamily="34" charset="-127"/>
@@ -846,232 +1255,173 @@
       </p:sp>
       <p:sp>
         <p:nvSpPr>
-          <p:cNvPr id="13" name="텍스트: 템포"/>
-          <p:cNvSpPr txBox="1"/>
-          <p:nvPr/>
-        </p:nvSpPr>
-        <p:spPr>
-          <a:xfrm>
-            <a:off x="6343650" y="4034320"/>
-            <a:ext cx="1753493" cy="409575"/>
-          </a:xfrm>
-          <a:prstGeom prst="rect">
-            <a:avLst/>
-          </a:prstGeom>
-          <a:noFill/>
-          <a:ln>
-            <a:noFill/>
-          </a:ln>
-        </p:spPr>
-        <p:txBody>
-          <a:bodyPr vert="horz" wrap="none" lIns="0" tIns="0" rIns="0" bIns="0" rtlCol="0" anchor="ctr" anchorCtr="0">
-            <a:noAutofit/>
-          </a:bodyPr>
-          <a:lstStyle/>
-          <a:p>
-            <a:pPr algn="ctr">
-              <a:lnSpc>
-                <a:spcPct val="100000"/>
-              </a:lnSpc>
-              <a:spcBef>
-                <a:spcPts val="0"/>
-              </a:spcBef>
-              <a:spcAft>
-                <a:spcPts val="0"/>
-              </a:spcAft>
-              <a:buNone/>
-            </a:pPr>
-            <a:r>
-              <a:rPr lang="ko-KR" altLang="en-US" sz="2700" b="0" i="0" spc="-81" kern="0" dirty="0">
-                <a:solidFill>
-                  <a:srgbClr val="FFFFFF"/>
-                </a:solidFill>
-                <a:latin typeface="RCardnews W750" pitchFamily="34" charset="-127"/>
-                <a:ea typeface="RCardnews W750" pitchFamily="34" charset="-127"/>
-                <a:cs typeface="RCardnews W750" pitchFamily="34" charset="-127"/>
-              </a:rPr>
-              <a:t xml:space="preserve">템포</a:t>
-            </a:r>
-            <a:endParaRPr lang="ko-KR" altLang="en-US" sz="2700" b="0" i="0" spc="-81" kern="0" dirty="0">
-              <a:solidFill>
-                <a:srgbClr val="FFFFFF"/>
-              </a:solidFill>
-              <a:latin typeface="RCardnews W750" pitchFamily="34" charset="-127"/>
-              <a:ea typeface="RCardnews W750" pitchFamily="34" charset="-127"/>
-              <a:cs typeface="RCardnews W750" pitchFamily="34" charset="-127"/>
-            </a:endParaRPr>
-          </a:p>
-        </p:txBody>
-      </p:sp>
-      <p:sp>
-        <p:nvSpPr>
-          <p:cNvPr id="14" name="텍스트: 인터벌"/>
-          <p:cNvSpPr txBox="1"/>
-          <p:nvPr/>
-        </p:nvSpPr>
-        <p:spPr>
-          <a:xfrm>
-            <a:off x="4762500" y="5291620"/>
-            <a:ext cx="2058591" cy="409575"/>
-          </a:xfrm>
-          <a:prstGeom prst="rect">
-            <a:avLst/>
-          </a:prstGeom>
-          <a:noFill/>
-          <a:ln>
-            <a:noFill/>
-          </a:ln>
-        </p:spPr>
-        <p:txBody>
-          <a:bodyPr vert="horz" wrap="none" lIns="0" tIns="0" rIns="0" bIns="0" rtlCol="0" anchor="ctr" anchorCtr="0">
-            <a:noAutofit/>
-          </a:bodyPr>
-          <a:lstStyle/>
-          <a:p>
-            <a:pPr algn="ctr">
-              <a:lnSpc>
-                <a:spcPct val="100000"/>
-              </a:lnSpc>
-              <a:spcBef>
-                <a:spcPts val="0"/>
-              </a:spcBef>
-              <a:spcAft>
-                <a:spcPts val="0"/>
-              </a:spcAft>
-              <a:buNone/>
-            </a:pPr>
-            <a:r>
-              <a:rPr lang="ko-KR" altLang="en-US" sz="2700" b="0" i="0" spc="-81" kern="0" dirty="0">
-                <a:solidFill>
-                  <a:srgbClr val="FFFFFF"/>
-                </a:solidFill>
-                <a:latin typeface="RCardnews W750" pitchFamily="34" charset="-127"/>
-                <a:ea typeface="RCardnews W750" pitchFamily="34" charset="-127"/>
-                <a:cs typeface="RCardnews W750" pitchFamily="34" charset="-127"/>
-              </a:rPr>
-              <a:t xml:space="preserve">인터벌</a:t>
-            </a:r>
-            <a:endParaRPr lang="ko-KR" altLang="en-US" sz="2700" b="0" i="0" spc="-81" kern="0" dirty="0">
-              <a:solidFill>
-                <a:srgbClr val="FFFFFF"/>
-              </a:solidFill>
-              <a:latin typeface="RCardnews W750" pitchFamily="34" charset="-127"/>
-              <a:ea typeface="RCardnews W750" pitchFamily="34" charset="-127"/>
-              <a:cs typeface="RCardnews W750" pitchFamily="34" charset="-127"/>
-            </a:endParaRPr>
-          </a:p>
-        </p:txBody>
-      </p:sp>
-      <p:sp>
-        <p:nvSpPr>
-          <p:cNvPr id="15" name="텍스트: 장거리"/>
-          <p:cNvSpPr txBox="1"/>
-          <p:nvPr/>
-        </p:nvSpPr>
-        <p:spPr>
-          <a:xfrm>
-            <a:off x="7620000" y="5710720"/>
-            <a:ext cx="2058591" cy="409575"/>
-          </a:xfrm>
-          <a:prstGeom prst="rect">
-            <a:avLst/>
-          </a:prstGeom>
-          <a:noFill/>
-          <a:ln>
-            <a:noFill/>
-          </a:ln>
-        </p:spPr>
-        <p:txBody>
-          <a:bodyPr vert="horz" wrap="none" lIns="0" tIns="0" rIns="0" bIns="0" rtlCol="0" anchor="ctr" anchorCtr="0">
-            <a:noAutofit/>
-          </a:bodyPr>
-          <a:lstStyle/>
-          <a:p>
-            <a:pPr algn="ctr">
-              <a:lnSpc>
-                <a:spcPct val="100000"/>
-              </a:lnSpc>
-              <a:spcBef>
-                <a:spcPts val="0"/>
-              </a:spcBef>
-              <a:spcAft>
-                <a:spcPts val="0"/>
-              </a:spcAft>
-              <a:buNone/>
-            </a:pPr>
-            <a:r>
-              <a:rPr lang="ko-KR" altLang="en-US" sz="2700" b="0" i="0" spc="-81" kern="0" dirty="0">
-                <a:solidFill>
-                  <a:srgbClr val="FFFFFF"/>
-                </a:solidFill>
-                <a:latin typeface="RCardnews W750" pitchFamily="34" charset="-127"/>
-                <a:ea typeface="RCardnews W750" pitchFamily="34" charset="-127"/>
-                <a:cs typeface="RCardnews W750" pitchFamily="34" charset="-127"/>
-              </a:rPr>
-              <a:t xml:space="preserve">장거리</a:t>
-            </a:r>
-            <a:endParaRPr lang="ko-KR" altLang="en-US" sz="2700" b="0" i="0" spc="-81" kern="0" dirty="0">
-              <a:solidFill>
-                <a:srgbClr val="FFFFFF"/>
-              </a:solidFill>
-              <a:latin typeface="RCardnews W750" pitchFamily="34" charset="-127"/>
-              <a:ea typeface="RCardnews W750" pitchFamily="34" charset="-127"/>
-              <a:cs typeface="RCardnews W750" pitchFamily="34" charset="-127"/>
-            </a:endParaRPr>
-          </a:p>
-        </p:txBody>
-      </p:sp>
-      <p:sp>
-        <p:nvSpPr>
-          <p:cNvPr id="16" name="텍스트: 앗! 통증?!"/>
-          <p:cNvSpPr txBox="1"/>
-          <p:nvPr/>
-        </p:nvSpPr>
-        <p:spPr>
-          <a:xfrm>
-            <a:off x="3714750" y="4103281"/>
-            <a:ext cx="2715518" cy="457200"/>
-          </a:xfrm>
-          <a:prstGeom prst="rect">
-            <a:avLst/>
-          </a:prstGeom>
-          <a:noFill/>
-          <a:ln>
-            <a:noFill/>
-          </a:ln>
-        </p:spPr>
-        <p:txBody>
-          <a:bodyPr vert="horz" wrap="none" lIns="0" tIns="0" rIns="0" bIns="0" rtlCol="0" anchor="ctr" anchorCtr="0">
-            <a:noAutofit/>
-          </a:bodyPr>
-          <a:lstStyle/>
-          <a:p>
-            <a:pPr algn="ctr">
-              <a:lnSpc>
-                <a:spcPct val="100000"/>
-              </a:lnSpc>
-              <a:spcBef>
-                <a:spcPts val="0"/>
-              </a:spcBef>
-              <a:spcAft>
-                <a:spcPts val="0"/>
-              </a:spcAft>
-              <a:buNone/>
-            </a:pPr>
-            <a:r>
-              <a:rPr lang="ko-KR" altLang="en-US" sz="3000" b="0" i="0" spc="-90" kern="0" dirty="0">
-                <a:solidFill>
-                  <a:srgbClr val="FFFFFF"/>
+          <p:cNvPr id="17" name="텍스트: 운동량이나 강도가 갑자기 늘면"/>
+          <p:cNvSpPr txBox="1"/>
+          <p:nvPr/>
+        </p:nvSpPr>
+        <p:spPr>
+          <a:xfrm>
+            <a:off x="1956792" y="8734568"/>
+            <a:ext cx="6373416" cy="504825"/>
+          </a:xfrm>
+          <a:prstGeom prst="rect">
+            <a:avLst/>
+          </a:prstGeom>
+          <a:noFill/>
+          <a:ln>
+            <a:noFill/>
+          </a:ln>
+        </p:spPr>
+        <p:txBody>
+          <a:bodyPr vert="horz" wrap="none" lIns="0" tIns="0" rIns="0" bIns="0" rtlCol="0" anchor="ctr" anchorCtr="0">
+            <a:noAutofit/>
+          </a:bodyPr>
+          <a:lstStyle/>
+          <a:p>
+            <a:pPr algn="ctr">
+              <a:lnSpc>
+                <a:spcPct val="100000"/>
+              </a:lnSpc>
+              <a:spcBef>
+                <a:spcPts val="0"/>
+              </a:spcBef>
+              <a:spcAft>
+                <a:spcPts val="0"/>
+              </a:spcAft>
+              <a:buNone/>
+            </a:pPr>
+            <a:r>
+              <a:rPr lang="ko-KR" altLang="en-US" sz="3300" b="0" i="0" spc="-66" kern="0" dirty="0">
+                <a:solidFill>
+                  <a:srgbClr val="121416"/>
+                </a:solidFill>
+                <a:latin typeface="RCardnews W500" pitchFamily="34" charset="-127"/>
+                <a:ea typeface="RCardnews W500" pitchFamily="34" charset="-127"/>
+                <a:cs typeface="RCardnews W500" pitchFamily="34" charset="-127"/>
+              </a:rPr>
+              <a:t xml:space="preserve">운동량이나 강도가 갑자기 늘면</a:t>
+            </a:r>
+            <a:endParaRPr lang="ko-KR" altLang="en-US" sz="3300" b="0" i="0" spc="-66" kern="0" dirty="0">
+              <a:solidFill>
+                <a:srgbClr val="121416"/>
+              </a:solidFill>
+              <a:latin typeface="RCardnews W500" pitchFamily="34" charset="-127"/>
+              <a:ea typeface="RCardnews W500" pitchFamily="34" charset="-127"/>
+              <a:cs typeface="RCardnews W500" pitchFamily="34" charset="-127"/>
+            </a:endParaRPr>
+          </a:p>
+        </p:txBody>
+      </p:sp>
+      <p:sp>
+        <p:nvSpPr>
+          <p:cNvPr id="18" name="텍스트: 감당 능력을 넘어설 수 있습니다."/>
+          <p:cNvSpPr txBox="1"/>
+          <p:nvPr/>
+        </p:nvSpPr>
+        <p:spPr>
+          <a:xfrm>
+            <a:off x="1843832" y="9329583"/>
+            <a:ext cx="6599337" cy="504825"/>
+          </a:xfrm>
+          <a:prstGeom prst="rect">
+            <a:avLst/>
+          </a:prstGeom>
+          <a:noFill/>
+          <a:ln>
+            <a:noFill/>
+          </a:ln>
+        </p:spPr>
+        <p:txBody>
+          <a:bodyPr vert="horz" wrap="none" lIns="0" tIns="0" rIns="0" bIns="0" rtlCol="0" anchor="ctr" anchorCtr="0">
+            <a:noAutofit/>
+          </a:bodyPr>
+          <a:lstStyle/>
+          <a:p>
+            <a:pPr algn="ctr">
+              <a:lnSpc>
+                <a:spcPct val="100000"/>
+              </a:lnSpc>
+              <a:spcBef>
+                <a:spcPts val="0"/>
+              </a:spcBef>
+              <a:spcAft>
+                <a:spcPts val="0"/>
+              </a:spcAft>
+              <a:buNone/>
+            </a:pPr>
+            <a:r>
+              <a:rPr lang="ko-KR" altLang="en-US" sz="3300" b="0" i="0" spc="-66" kern="0" dirty="0">
+                <a:solidFill>
+                  <a:srgbClr val="121416"/>
+                </a:solidFill>
+                <a:latin typeface="RCardnews W500" pitchFamily="34" charset="-127"/>
+                <a:ea typeface="RCardnews W500" pitchFamily="34" charset="-127"/>
+                <a:cs typeface="RCardnews W500" pitchFamily="34" charset="-127"/>
+              </a:rPr>
+              <a:t xml:space="preserve">감당 능력을 넘어설 수 있습니다.</a:t>
+            </a:r>
+            <a:endParaRPr lang="ko-KR" altLang="en-US" sz="3300" b="0" i="0" spc="-66" kern="0" dirty="0">
+              <a:solidFill>
+                <a:srgbClr val="121416"/>
+              </a:solidFill>
+              <a:latin typeface="RCardnews W500" pitchFamily="34" charset="-127"/>
+              <a:ea typeface="RCardnews W500" pitchFamily="34" charset="-127"/>
+              <a:cs typeface="RCardnews W500" pitchFamily="34" charset="-127"/>
+            </a:endParaRPr>
+          </a:p>
+        </p:txBody>
+      </p:sp>
+      <p:sp>
+        <p:nvSpPr>
+          <p:cNvPr id="19" name="텍스트: 문제는 운동 자체보다"/>
+          <p:cNvSpPr txBox="1"/>
+          <p:nvPr/>
+        </p:nvSpPr>
+        <p:spPr>
+          <a:xfrm>
+            <a:off x="2788593" y="10172248"/>
+            <a:ext cx="4709666" cy="504825"/>
+          </a:xfrm>
+          <a:prstGeom prst="rect">
+            <a:avLst/>
+          </a:prstGeom>
+          <a:noFill/>
+          <a:ln>
+            <a:noFill/>
+          </a:ln>
+        </p:spPr>
+        <p:txBody>
+          <a:bodyPr vert="horz" wrap="none" lIns="0" tIns="0" rIns="0" bIns="0" rtlCol="0" anchor="ctr" anchorCtr="0">
+            <a:noAutofit/>
+          </a:bodyPr>
+          <a:lstStyle/>
+          <a:p>
+            <a:pPr algn="ctr">
+              <a:lnSpc>
+                <a:spcPct val="100000"/>
+              </a:lnSpc>
+              <a:spcBef>
+                <a:spcPts val="0"/>
+              </a:spcBef>
+              <a:spcAft>
+                <a:spcPts val="0"/>
+              </a:spcAft>
+              <a:buNone/>
+            </a:pPr>
+            <a:r>
+              <a:rPr lang="ko-KR" altLang="en-US" sz="3300" b="0" i="0" spc="-99" kern="0" dirty="0">
+                <a:solidFill>
+                  <a:srgbClr val="121416"/>
                 </a:solidFill>
                 <a:latin typeface="RCardnews W800" pitchFamily="34" charset="-127"/>
                 <a:ea typeface="RCardnews W800" pitchFamily="34" charset="-127"/>
                 <a:cs typeface="RCardnews W800" pitchFamily="34" charset="-127"/>
               </a:rPr>
-              <a:t xml:space="preserve">앗! 통증?!</a:t>
-            </a:r>
-            <a:endParaRPr lang="ko-KR" altLang="en-US" sz="3000" b="0" i="0" spc="-90" kern="0" dirty="0">
-              <a:solidFill>
-                <a:srgbClr val="FFFFFF"/>
+              <a:t xml:space="preserve">문제는 운동 자체보다</a:t>
+            </a:r>
+            <a:endParaRPr lang="ko-KR" altLang="en-US" sz="3300" b="0" i="0" spc="-99" kern="0" dirty="0">
+              <a:solidFill>
+                <a:srgbClr val="121416"/>
               </a:solidFill>
               <a:latin typeface="RCardnews W800" pitchFamily="34" charset="-127"/>
               <a:ea typeface="RCardnews W800" pitchFamily="34" charset="-127"/>
@@ -1082,416 +1432,62 @@
       </p:sp>
       <p:sp>
         <p:nvSpPr>
-          <p:cNvPr id="17" name="텍스트: 컵 = 감당할 수 있는 능력"/>
-          <p:cNvSpPr txBox="1"/>
-          <p:nvPr/>
-        </p:nvSpPr>
-        <p:spPr>
-          <a:xfrm>
-            <a:off x="751433" y="7291870"/>
-            <a:ext cx="4554885" cy="409575"/>
-          </a:xfrm>
-          <a:prstGeom prst="rect">
-            <a:avLst/>
-          </a:prstGeom>
-          <a:noFill/>
-          <a:ln>
-            <a:noFill/>
-          </a:ln>
-        </p:spPr>
-        <p:txBody>
-          <a:bodyPr vert="horz" wrap="none" lIns="0" tIns="0" rIns="0" bIns="0" rtlCol="0" anchor="ctr" anchorCtr="0">
-            <a:noAutofit/>
-          </a:bodyPr>
-          <a:lstStyle/>
-          <a:p>
-            <a:pPr algn="ctr">
-              <a:lnSpc>
-                <a:spcPct val="100000"/>
-              </a:lnSpc>
-              <a:spcBef>
-                <a:spcPts val="0"/>
-              </a:spcBef>
-              <a:spcAft>
-                <a:spcPts val="0"/>
-              </a:spcAft>
-              <a:buNone/>
-            </a:pPr>
-            <a:r>
-              <a:rPr lang="ko-KR" altLang="en-US" sz="2700" b="0" i="0" spc="-54" kern="0" dirty="0">
-                <a:solidFill>
-                  <a:srgbClr val="5E6570"/>
-                </a:solidFill>
-                <a:latin typeface="RCardnews W500" pitchFamily="34" charset="-127"/>
-                <a:ea typeface="RCardnews W500" pitchFamily="34" charset="-127"/>
-                <a:cs typeface="RCardnews W500" pitchFamily="34" charset="-127"/>
-              </a:rPr>
-              <a:t xml:space="preserve">컵 = 감당할 수 있는 능력</a:t>
-            </a:r>
-            <a:endParaRPr lang="ko-KR" altLang="en-US" sz="2700" b="0" i="0" spc="-54" kern="0" dirty="0">
-              <a:solidFill>
-                <a:srgbClr val="5E6570"/>
-              </a:solidFill>
-              <a:latin typeface="RCardnews W500" pitchFamily="34" charset="-127"/>
-              <a:ea typeface="RCardnews W500" pitchFamily="34" charset="-127"/>
-              <a:cs typeface="RCardnews W500" pitchFamily="34" charset="-127"/>
-            </a:endParaRPr>
-          </a:p>
-        </p:txBody>
-      </p:sp>
-      <p:sp>
-        <p:nvSpPr>
-          <p:cNvPr id="18" name="텍스트: 물 = 운동 부하"/>
-          <p:cNvSpPr txBox="1"/>
-          <p:nvPr/>
-        </p:nvSpPr>
-        <p:spPr>
-          <a:xfrm>
-            <a:off x="1457771" y="7771840"/>
-            <a:ext cx="3142208" cy="409575"/>
-          </a:xfrm>
-          <a:prstGeom prst="rect">
-            <a:avLst/>
-          </a:prstGeom>
-          <a:noFill/>
-          <a:ln>
-            <a:noFill/>
-          </a:ln>
-        </p:spPr>
-        <p:txBody>
-          <a:bodyPr vert="horz" wrap="none" lIns="0" tIns="0" rIns="0" bIns="0" rtlCol="0" anchor="ctr" anchorCtr="0">
-            <a:noAutofit/>
-          </a:bodyPr>
-          <a:lstStyle/>
-          <a:p>
-            <a:pPr algn="ctr">
-              <a:lnSpc>
-                <a:spcPct val="100000"/>
-              </a:lnSpc>
-              <a:spcBef>
-                <a:spcPts val="0"/>
-              </a:spcBef>
-              <a:spcAft>
-                <a:spcPts val="0"/>
-              </a:spcAft>
-              <a:buNone/>
-            </a:pPr>
-            <a:r>
-              <a:rPr lang="ko-KR" altLang="en-US" sz="2700" b="0" i="0" spc="-54" kern="0" dirty="0">
-                <a:solidFill>
-                  <a:srgbClr val="5E6570"/>
-                </a:solidFill>
-                <a:latin typeface="RCardnews W500" pitchFamily="34" charset="-127"/>
-                <a:ea typeface="RCardnews W500" pitchFamily="34" charset="-127"/>
-                <a:cs typeface="RCardnews W500" pitchFamily="34" charset="-127"/>
-              </a:rPr>
-              <a:t xml:space="preserve">물 = 운동 부하</a:t>
-            </a:r>
-            <a:endParaRPr lang="ko-KR" altLang="en-US" sz="2700" b="0" i="0" spc="-54" kern="0" dirty="0">
-              <a:solidFill>
-                <a:srgbClr val="5E6570"/>
-              </a:solidFill>
-              <a:latin typeface="RCardnews W500" pitchFamily="34" charset="-127"/>
-              <a:ea typeface="RCardnews W500" pitchFamily="34" charset="-127"/>
-              <a:cs typeface="RCardnews W500" pitchFamily="34" charset="-127"/>
-            </a:endParaRPr>
-          </a:p>
-        </p:txBody>
-      </p:sp>
-      <p:sp>
-        <p:nvSpPr>
-          <p:cNvPr id="19" name="텍스트: 훈련이 한꺼번에"/>
-          <p:cNvSpPr txBox="1"/>
-          <p:nvPr/>
-        </p:nvSpPr>
-        <p:spPr>
-          <a:xfrm>
-            <a:off x="5561707" y="7291870"/>
-            <a:ext cx="3392537" cy="409575"/>
-          </a:xfrm>
-          <a:prstGeom prst="rect">
-            <a:avLst/>
-          </a:prstGeom>
-          <a:noFill/>
-          <a:ln>
-            <a:noFill/>
-          </a:ln>
-        </p:spPr>
-        <p:txBody>
-          <a:bodyPr vert="horz" wrap="none" lIns="0" tIns="0" rIns="0" bIns="0" rtlCol="0" anchor="ctr" anchorCtr="0">
-            <a:noAutofit/>
-          </a:bodyPr>
-          <a:lstStyle/>
-          <a:p>
-            <a:pPr algn="ctr">
-              <a:lnSpc>
-                <a:spcPct val="100000"/>
-              </a:lnSpc>
-              <a:spcBef>
-                <a:spcPts val="0"/>
-              </a:spcBef>
-              <a:spcAft>
-                <a:spcPts val="0"/>
-              </a:spcAft>
-              <a:buNone/>
-            </a:pPr>
-            <a:r>
-              <a:rPr lang="ko-KR" altLang="en-US" sz="2700" b="0" i="0" spc="-54" kern="0" dirty="0">
-                <a:solidFill>
-                  <a:srgbClr val="5E6570"/>
-                </a:solidFill>
-                <a:latin typeface="RCardnews W500" pitchFamily="34" charset="-127"/>
-                <a:ea typeface="RCardnews W500" pitchFamily="34" charset="-127"/>
-                <a:cs typeface="RCardnews W500" pitchFamily="34" charset="-127"/>
-              </a:rPr>
-              <a:t xml:space="preserve">훈련이 한꺼번에</a:t>
-            </a:r>
-            <a:endParaRPr lang="ko-KR" altLang="en-US" sz="2700" b="0" i="0" spc="-54" kern="0" dirty="0">
-              <a:solidFill>
-                <a:srgbClr val="5E6570"/>
-              </a:solidFill>
-              <a:latin typeface="RCardnews W500" pitchFamily="34" charset="-127"/>
-              <a:ea typeface="RCardnews W500" pitchFamily="34" charset="-127"/>
-              <a:cs typeface="RCardnews W500" pitchFamily="34" charset="-127"/>
-            </a:endParaRPr>
-          </a:p>
-        </p:txBody>
-      </p:sp>
-      <p:sp>
-        <p:nvSpPr>
-          <p:cNvPr id="20" name="텍스트: 갑자기 몰리면"/>
-          <p:cNvSpPr txBox="1"/>
-          <p:nvPr/>
-        </p:nvSpPr>
-        <p:spPr>
-          <a:xfrm>
-            <a:off x="5716042" y="7771840"/>
-            <a:ext cx="3083868" cy="409575"/>
-          </a:xfrm>
-          <a:prstGeom prst="rect">
-            <a:avLst/>
-          </a:prstGeom>
-          <a:noFill/>
-          <a:ln>
-            <a:noFill/>
-          </a:ln>
-        </p:spPr>
-        <p:txBody>
-          <a:bodyPr vert="horz" wrap="none" lIns="0" tIns="0" rIns="0" bIns="0" rtlCol="0" anchor="ctr" anchorCtr="0">
-            <a:noAutofit/>
-          </a:bodyPr>
-          <a:lstStyle/>
-          <a:p>
-            <a:pPr algn="ctr">
-              <a:lnSpc>
-                <a:spcPct val="100000"/>
-              </a:lnSpc>
-              <a:spcBef>
-                <a:spcPts val="0"/>
-              </a:spcBef>
-              <a:spcAft>
-                <a:spcPts val="0"/>
-              </a:spcAft>
-              <a:buNone/>
-            </a:pPr>
-            <a:r>
-              <a:rPr lang="ko-KR" altLang="en-US" sz="2700" b="0" i="0" spc="-54" kern="0" dirty="0">
+          <p:cNvPr id="20" name="텍스트: 갑작스러운 증가일 수 있습니다"/>
+          <p:cNvSpPr txBox="1"/>
+          <p:nvPr/>
+        </p:nvSpPr>
+        <p:spPr>
+          <a:xfrm>
+            <a:off x="1990279" y="10716959"/>
+            <a:ext cx="6306443" cy="504825"/>
+          </a:xfrm>
+          <a:prstGeom prst="rect">
+            <a:avLst/>
+          </a:prstGeom>
+          <a:noFill/>
+          <a:ln>
+            <a:noFill/>
+          </a:ln>
+        </p:spPr>
+        <p:txBody>
+          <a:bodyPr vert="horz" wrap="none" lIns="0" tIns="0" rIns="0" bIns="0" rtlCol="0" anchor="ctr" anchorCtr="0">
+            <a:noAutofit/>
+          </a:bodyPr>
+          <a:lstStyle/>
+          <a:p>
+            <a:pPr algn="ctr">
+              <a:lnSpc>
+                <a:spcPct val="100000"/>
+              </a:lnSpc>
+              <a:spcBef>
+                <a:spcPts val="0"/>
+              </a:spcBef>
+              <a:spcAft>
+                <a:spcPts val="0"/>
+              </a:spcAft>
+              <a:buNone/>
+            </a:pPr>
+            <a:r>
+              <a:rPr lang="ko-KR" altLang="en-US" sz="3300" b="0" i="0" spc="-99" kern="0" dirty="0">
                 <a:solidFill>
                   <a:srgbClr val="0879D8"/>
-                </a:solidFill>
-                <a:latin typeface="RCardnews W750" pitchFamily="34" charset="-127"/>
-                <a:ea typeface="RCardnews W750" pitchFamily="34" charset="-127"/>
-                <a:cs typeface="RCardnews W750" pitchFamily="34" charset="-127"/>
-              </a:rPr>
-              <a:t xml:space="preserve">갑자기</a:t>
-            </a:r>
-            <a:r>
-              <a:rPr lang="ko-KR" altLang="en-US" sz="2700" b="0" i="0" spc="-54" kern="0" dirty="0">
-                <a:solidFill>
-                  <a:srgbClr val="5E6570"/>
-                </a:solidFill>
-                <a:latin typeface="RCardnews W500" pitchFamily="34" charset="-127"/>
-                <a:ea typeface="RCardnews W500" pitchFamily="34" charset="-127"/>
-                <a:cs typeface="RCardnews W500" pitchFamily="34" charset="-127"/>
-              </a:rPr>
-              <a:t xml:space="preserve"> 몰리면</a:t>
-            </a:r>
-            <a:endParaRPr lang="ko-KR" altLang="en-US" sz="2700" b="0" i="0" spc="-54" kern="0" dirty="0">
-              <a:solidFill>
-                <a:srgbClr val="5E6570"/>
-              </a:solidFill>
-              <a:latin typeface="RCardnews W500" pitchFamily="34" charset="-127"/>
-              <a:ea typeface="RCardnews W500" pitchFamily="34" charset="-127"/>
-              <a:cs typeface="RCardnews W500" pitchFamily="34" charset="-127"/>
-            </a:endParaRPr>
-          </a:p>
-        </p:txBody>
-      </p:sp>
-      <p:sp>
-        <p:nvSpPr>
-          <p:cNvPr id="21" name="텍스트: 운동량이나 강도가 갑자기 늘면"/>
-          <p:cNvSpPr txBox="1"/>
-          <p:nvPr/>
-        </p:nvSpPr>
-        <p:spPr>
-          <a:xfrm>
-            <a:off x="1956792" y="8608808"/>
-            <a:ext cx="6373416" cy="504825"/>
-          </a:xfrm>
-          <a:prstGeom prst="rect">
-            <a:avLst/>
-          </a:prstGeom>
-          <a:noFill/>
-          <a:ln>
-            <a:noFill/>
-          </a:ln>
-        </p:spPr>
-        <p:txBody>
-          <a:bodyPr vert="horz" wrap="none" lIns="0" tIns="0" rIns="0" bIns="0" rtlCol="0" anchor="ctr" anchorCtr="0">
-            <a:noAutofit/>
-          </a:bodyPr>
-          <a:lstStyle/>
-          <a:p>
-            <a:pPr algn="ctr">
-              <a:lnSpc>
-                <a:spcPct val="100000"/>
-              </a:lnSpc>
-              <a:spcBef>
-                <a:spcPts val="0"/>
-              </a:spcBef>
-              <a:spcAft>
-                <a:spcPts val="0"/>
-              </a:spcAft>
-              <a:buNone/>
-            </a:pPr>
-            <a:r>
-              <a:rPr lang="ko-KR" altLang="en-US" sz="3300" b="0" i="0" spc="-66" kern="0" dirty="0">
-                <a:solidFill>
-                  <a:srgbClr val="121416"/>
-                </a:solidFill>
-                <a:latin typeface="RCardnews W500" pitchFamily="34" charset="-127"/>
-                <a:ea typeface="RCardnews W500" pitchFamily="34" charset="-127"/>
-                <a:cs typeface="RCardnews W500" pitchFamily="34" charset="-127"/>
-              </a:rPr>
-              <a:t xml:space="preserve">운동량이나 강도가 갑자기 늘면</a:t>
-            </a:r>
-            <a:endParaRPr lang="ko-KR" altLang="en-US" sz="3300" b="0" i="0" spc="-66" kern="0" dirty="0">
-              <a:solidFill>
-                <a:srgbClr val="121416"/>
-              </a:solidFill>
-              <a:latin typeface="RCardnews W500" pitchFamily="34" charset="-127"/>
-              <a:ea typeface="RCardnews W500" pitchFamily="34" charset="-127"/>
-              <a:cs typeface="RCardnews W500" pitchFamily="34" charset="-127"/>
-            </a:endParaRPr>
-          </a:p>
-        </p:txBody>
-      </p:sp>
-      <p:sp>
-        <p:nvSpPr>
-          <p:cNvPr id="22" name="텍스트: 감당 능력을 넘어설 수 있습니다."/>
-          <p:cNvSpPr txBox="1"/>
-          <p:nvPr/>
-        </p:nvSpPr>
-        <p:spPr>
-          <a:xfrm>
-            <a:off x="1843832" y="9203823"/>
-            <a:ext cx="6599337" cy="504825"/>
-          </a:xfrm>
-          <a:prstGeom prst="rect">
-            <a:avLst/>
-          </a:prstGeom>
-          <a:noFill/>
-          <a:ln>
-            <a:noFill/>
-          </a:ln>
-        </p:spPr>
-        <p:txBody>
-          <a:bodyPr vert="horz" wrap="none" lIns="0" tIns="0" rIns="0" bIns="0" rtlCol="0" anchor="ctr" anchorCtr="0">
-            <a:noAutofit/>
-          </a:bodyPr>
-          <a:lstStyle/>
-          <a:p>
-            <a:pPr algn="ctr">
-              <a:lnSpc>
-                <a:spcPct val="100000"/>
-              </a:lnSpc>
-              <a:spcBef>
-                <a:spcPts val="0"/>
-              </a:spcBef>
-              <a:spcAft>
-                <a:spcPts val="0"/>
-              </a:spcAft>
-              <a:buNone/>
-            </a:pPr>
-            <a:r>
-              <a:rPr lang="ko-KR" altLang="en-US" sz="3300" b="0" i="0" spc="-66" kern="0" dirty="0">
-                <a:solidFill>
-                  <a:srgbClr val="121416"/>
-                </a:solidFill>
-                <a:latin typeface="RCardnews W500" pitchFamily="34" charset="-127"/>
-                <a:ea typeface="RCardnews W500" pitchFamily="34" charset="-127"/>
-                <a:cs typeface="RCardnews W500" pitchFamily="34" charset="-127"/>
-              </a:rPr>
-              <a:t xml:space="preserve">감당 능력을 넘어설 수 있습니다.</a:t>
-            </a:r>
-            <a:endParaRPr lang="ko-KR" altLang="en-US" sz="3300" b="0" i="0" spc="-66" kern="0" dirty="0">
-              <a:solidFill>
-                <a:srgbClr val="121416"/>
-              </a:solidFill>
-              <a:latin typeface="RCardnews W500" pitchFamily="34" charset="-127"/>
-              <a:ea typeface="RCardnews W500" pitchFamily="34" charset="-127"/>
-              <a:cs typeface="RCardnews W500" pitchFamily="34" charset="-127"/>
-            </a:endParaRPr>
-          </a:p>
-        </p:txBody>
-      </p:sp>
-      <p:sp>
-        <p:nvSpPr>
-          <p:cNvPr id="23" name="텍스트: 문제는 운동 자체보다"/>
-          <p:cNvSpPr txBox="1"/>
-          <p:nvPr/>
-        </p:nvSpPr>
-        <p:spPr>
-          <a:xfrm>
-            <a:off x="2788593" y="10046488"/>
-            <a:ext cx="4709666" cy="504825"/>
-          </a:xfrm>
-          <a:prstGeom prst="rect">
-            <a:avLst/>
-          </a:prstGeom>
-          <a:noFill/>
-          <a:ln>
-            <a:noFill/>
-          </a:ln>
-        </p:spPr>
-        <p:txBody>
-          <a:bodyPr vert="horz" wrap="none" lIns="0" tIns="0" rIns="0" bIns="0" rtlCol="0" anchor="ctr" anchorCtr="0">
-            <a:noAutofit/>
-          </a:bodyPr>
-          <a:lstStyle/>
-          <a:p>
-            <a:pPr algn="ctr">
-              <a:lnSpc>
-                <a:spcPct val="100000"/>
-              </a:lnSpc>
-              <a:spcBef>
-                <a:spcPts val="0"/>
-              </a:spcBef>
-              <a:spcAft>
-                <a:spcPts val="0"/>
-              </a:spcAft>
-              <a:buNone/>
-            </a:pPr>
-            <a:r>
-              <a:rPr lang="ko-KR" altLang="en-US" sz="3300" b="0" i="0" spc="-99" kern="0" dirty="0">
-                <a:solidFill>
-                  <a:srgbClr val="121416"/>
                 </a:solidFill>
                 <a:latin typeface="RCardnews W800" pitchFamily="34" charset="-127"/>
                 <a:ea typeface="RCardnews W800" pitchFamily="34" charset="-127"/>
                 <a:cs typeface="RCardnews W800" pitchFamily="34" charset="-127"/>
               </a:rPr>
-              <a:t xml:space="preserve">문제는 운동 자체보다</a:t>
+              <a:t xml:space="preserve">갑작스러운 증가</a:t>
+            </a:r>
+            <a:r>
+              <a:rPr lang="ko-KR" altLang="en-US" sz="3300" b="0" i="0" spc="-99" kern="0" dirty="0">
+                <a:solidFill>
+                  <a:srgbClr val="121416"/>
+                </a:solidFill>
+                <a:latin typeface="RCardnews W800" pitchFamily="34" charset="-127"/>
+                <a:ea typeface="RCardnews W800" pitchFamily="34" charset="-127"/>
+                <a:cs typeface="RCardnews W800" pitchFamily="34" charset="-127"/>
+              </a:rPr>
+              <a:t xml:space="preserve">일 수 있습니다</a:t>
             </a:r>
             <a:endParaRPr lang="ko-KR" altLang="en-US" sz="3300" b="0" i="0" spc="-99" kern="0" dirty="0">
               <a:solidFill>
@@ -1506,83 +1502,13 @@
       </p:sp>
       <p:sp>
         <p:nvSpPr>
-          <p:cNvPr id="24" name="텍스트: 갑작스러운 증가일 수 있습니다"/>
-          <p:cNvSpPr txBox="1"/>
-          <p:nvPr/>
-        </p:nvSpPr>
-        <p:spPr>
-          <a:xfrm>
-            <a:off x="1990279" y="10591199"/>
-            <a:ext cx="6306443" cy="504825"/>
-          </a:xfrm>
-          <a:prstGeom prst="rect">
-            <a:avLst/>
-          </a:prstGeom>
-          <a:noFill/>
-          <a:ln>
-            <a:noFill/>
-          </a:ln>
-        </p:spPr>
-        <p:txBody>
-          <a:bodyPr vert="horz" wrap="none" lIns="0" tIns="0" rIns="0" bIns="0" rtlCol="0" anchor="ctr" anchorCtr="0">
-            <a:noAutofit/>
-          </a:bodyPr>
-          <a:lstStyle/>
-          <a:p>
-            <a:pPr algn="ctr">
-              <a:lnSpc>
-                <a:spcPct val="100000"/>
-              </a:lnSpc>
-              <a:spcBef>
-                <a:spcPts val="0"/>
-              </a:spcBef>
-              <a:spcAft>
-                <a:spcPts val="0"/>
-              </a:spcAft>
-              <a:buNone/>
-            </a:pPr>
-            <a:r>
-              <a:rPr lang="ko-KR" altLang="en-US" sz="3300" b="0" i="0" spc="-99" kern="0" dirty="0">
-                <a:solidFill>
-                  <a:srgbClr val="0879D8"/>
-                </a:solidFill>
-                <a:latin typeface="RCardnews W800" pitchFamily="34" charset="-127"/>
-                <a:ea typeface="RCardnews W800" pitchFamily="34" charset="-127"/>
-                <a:cs typeface="RCardnews W800" pitchFamily="34" charset="-127"/>
-              </a:rPr>
-              <a:t xml:space="preserve">갑작스러운 증가</a:t>
-            </a:r>
-            <a:r>
-              <a:rPr lang="ko-KR" altLang="en-US" sz="3300" b="0" i="0" spc="-99" kern="0" dirty="0">
-                <a:solidFill>
-                  <a:srgbClr val="121416"/>
-                </a:solidFill>
-                <a:latin typeface="RCardnews W800" pitchFamily="34" charset="-127"/>
-                <a:ea typeface="RCardnews W800" pitchFamily="34" charset="-127"/>
-                <a:cs typeface="RCardnews W800" pitchFamily="34" charset="-127"/>
-              </a:rPr>
-              <a:t xml:space="preserve">일 수 있습니다</a:t>
-            </a:r>
-            <a:endParaRPr lang="ko-KR" altLang="en-US" sz="3300" b="0" i="0" spc="-99" kern="0" dirty="0">
-              <a:solidFill>
-                <a:srgbClr val="121416"/>
-              </a:solidFill>
-              <a:latin typeface="RCardnews W800" pitchFamily="34" charset="-127"/>
-              <a:ea typeface="RCardnews W800" pitchFamily="34" charset="-127"/>
-              <a:cs typeface="RCardnews W800" pitchFamily="34" charset="-127"/>
-            </a:endParaRPr>
-          </a:p>
-        </p:txBody>
-      </p:sp>
-      <p:sp>
-        <p:nvSpPr>
-          <p:cNvPr id="25" name="텍스트: 참고: Cook et al., Br J Sp"/>
-          <p:cNvSpPr txBox="1"/>
-          <p:nvPr/>
-        </p:nvSpPr>
-        <p:spPr>
-          <a:xfrm>
-            <a:off x="2010073" y="11356509"/>
+          <p:cNvPr id="21" name="텍스트: 참고: Cook et al., Br J Sp"/>
+          <p:cNvSpPr txBox="1"/>
+          <p:nvPr/>
+        </p:nvSpPr>
+        <p:spPr>
+          <a:xfrm>
+            <a:off x="2010073" y="11482268"/>
             <a:ext cx="6266855" cy="342900"/>
           </a:xfrm>
           <a:prstGeom prst="rect">
